--- a/docs/pptx/entire/ritu-entire-linsubhr-ratio-hosp2.pptx
+++ b/docs/pptx/entire/ritu-entire-linsubhr-ratio-hosp2.pptx
@@ -2960,569 +2960,566 @@
           <p:spPr>
             <a:xfrm>
               <a:off x="1172049" y="2073503"/>
-              <a:ext cx="7090630" cy="3396018"/>
+              <a:ext cx="7090630" cy="3398838"/>
             </a:xfrm>
             <a:custGeom>
               <a:avLst/>
               <a:pathLst>
-                <a:path w="7090630" h="3396018">
+                <a:path w="7090630" h="3398838">
                   <a:moveTo>
-                    <a:pt x="1068927" y="0"/>
+                    <a:pt x="1102848" y="0"/>
                   </a:moveTo>
                   <a:lnTo>
-                    <a:pt x="1074337" y="11740"/>
-                  </a:lnTo>
-                  <a:lnTo>
-                    <a:pt x="1145960" y="160494"/>
-                  </a:lnTo>
-                  <a:lnTo>
-                    <a:pt x="1217582" y="302874"/>
-                  </a:lnTo>
-                  <a:lnTo>
-                    <a:pt x="1289205" y="439155"/>
-                  </a:lnTo>
-                  <a:lnTo>
-                    <a:pt x="1360827" y="569596"/>
-                  </a:lnTo>
-                  <a:lnTo>
-                    <a:pt x="1432450" y="694449"/>
-                  </a:lnTo>
-                  <a:lnTo>
-                    <a:pt x="1504073" y="813953"/>
-                  </a:lnTo>
-                  <a:lnTo>
-                    <a:pt x="1575695" y="928337"/>
-                  </a:lnTo>
-                  <a:lnTo>
-                    <a:pt x="1647318" y="1037820"/>
-                  </a:lnTo>
-                  <a:lnTo>
-                    <a:pt x="1718940" y="1142613"/>
-                  </a:lnTo>
-                  <a:lnTo>
-                    <a:pt x="1790563" y="1242916"/>
-                  </a:lnTo>
-                  <a:lnTo>
-                    <a:pt x="1862185" y="1338921"/>
-                  </a:lnTo>
-                  <a:lnTo>
-                    <a:pt x="1933808" y="1430814"/>
-                  </a:lnTo>
-                  <a:lnTo>
-                    <a:pt x="2005430" y="1518769"/>
-                  </a:lnTo>
-                  <a:lnTo>
-                    <a:pt x="2077053" y="1602956"/>
-                  </a:lnTo>
-                  <a:lnTo>
-                    <a:pt x="2148675" y="1683536"/>
-                  </a:lnTo>
-                  <a:lnTo>
-                    <a:pt x="2220298" y="1760664"/>
-                  </a:lnTo>
-                  <a:lnTo>
-                    <a:pt x="2291920" y="1834487"/>
-                  </a:lnTo>
-                  <a:lnTo>
-                    <a:pt x="2363543" y="1905147"/>
-                  </a:lnTo>
-                  <a:lnTo>
-                    <a:pt x="2435165" y="1972781"/>
-                  </a:lnTo>
-                  <a:lnTo>
-                    <a:pt x="2506788" y="2037516"/>
-                  </a:lnTo>
-                  <a:lnTo>
-                    <a:pt x="2578410" y="2099478"/>
-                  </a:lnTo>
-                  <a:lnTo>
-                    <a:pt x="2650033" y="2158785"/>
-                  </a:lnTo>
-                  <a:lnTo>
-                    <a:pt x="2721655" y="2215551"/>
-                  </a:lnTo>
-                  <a:lnTo>
-                    <a:pt x="2793278" y="2269886"/>
-                  </a:lnTo>
-                  <a:lnTo>
-                    <a:pt x="2864901" y="2321892"/>
-                  </a:lnTo>
-                  <a:lnTo>
-                    <a:pt x="2936523" y="2371670"/>
-                  </a:lnTo>
-                  <a:lnTo>
-                    <a:pt x="3008146" y="2419316"/>
-                  </a:lnTo>
-                  <a:lnTo>
-                    <a:pt x="3079768" y="2464920"/>
-                  </a:lnTo>
-                  <a:lnTo>
-                    <a:pt x="3151391" y="2508570"/>
-                  </a:lnTo>
-                  <a:lnTo>
-                    <a:pt x="3223013" y="2550350"/>
-                  </a:lnTo>
-                  <a:lnTo>
-                    <a:pt x="3294636" y="2590340"/>
-                  </a:lnTo>
-                  <a:lnTo>
-                    <a:pt x="3366258" y="2628617"/>
-                  </a:lnTo>
-                  <a:lnTo>
-                    <a:pt x="3437881" y="2656926"/>
-                  </a:lnTo>
-                  <a:lnTo>
-                    <a:pt x="3509503" y="2665561"/>
-                  </a:lnTo>
-                  <a:lnTo>
-                    <a:pt x="3581126" y="2674105"/>
-                  </a:lnTo>
-                  <a:lnTo>
-                    <a:pt x="3652748" y="2682560"/>
-                  </a:lnTo>
-                  <a:lnTo>
-                    <a:pt x="3724371" y="2690926"/>
-                  </a:lnTo>
-                  <a:lnTo>
-                    <a:pt x="3795993" y="2699206"/>
-                  </a:lnTo>
-                  <a:lnTo>
-                    <a:pt x="3867616" y="2707398"/>
-                  </a:lnTo>
-                  <a:lnTo>
-                    <a:pt x="3939238" y="2715506"/>
-                  </a:lnTo>
-                  <a:lnTo>
-                    <a:pt x="4010861" y="2723528"/>
-                  </a:lnTo>
-                  <a:lnTo>
-                    <a:pt x="4082483" y="2731467"/>
-                  </a:lnTo>
-                  <a:lnTo>
-                    <a:pt x="4154106" y="2739323"/>
-                  </a:lnTo>
-                  <a:lnTo>
-                    <a:pt x="4225729" y="2747097"/>
-                  </a:lnTo>
-                  <a:lnTo>
-                    <a:pt x="4297351" y="2754789"/>
-                  </a:lnTo>
-                  <a:lnTo>
-                    <a:pt x="4368974" y="2762402"/>
-                  </a:lnTo>
-                  <a:lnTo>
-                    <a:pt x="4440596" y="2769934"/>
-                  </a:lnTo>
-                  <a:lnTo>
-                    <a:pt x="4512219" y="2777389"/>
-                  </a:lnTo>
-                  <a:lnTo>
-                    <a:pt x="4583841" y="2784765"/>
-                  </a:lnTo>
-                  <a:lnTo>
-                    <a:pt x="4655464" y="2792064"/>
-                  </a:lnTo>
-                  <a:lnTo>
-                    <a:pt x="4727086" y="2799287"/>
-                  </a:lnTo>
-                  <a:lnTo>
-                    <a:pt x="4798709" y="2806435"/>
-                  </a:lnTo>
-                  <a:lnTo>
-                    <a:pt x="4870331" y="2813508"/>
-                  </a:lnTo>
-                  <a:lnTo>
-                    <a:pt x="4941954" y="2820507"/>
-                  </a:lnTo>
-                  <a:lnTo>
-                    <a:pt x="5013576" y="2827433"/>
-                  </a:lnTo>
-                  <a:lnTo>
-                    <a:pt x="5085199" y="2834287"/>
-                  </a:lnTo>
-                  <a:lnTo>
-                    <a:pt x="5156821" y="2841069"/>
-                  </a:lnTo>
-                  <a:lnTo>
-                    <a:pt x="5228444" y="2847780"/>
-                  </a:lnTo>
-                  <a:lnTo>
-                    <a:pt x="5300066" y="2854421"/>
-                  </a:lnTo>
-                  <a:lnTo>
-                    <a:pt x="5371689" y="2860993"/>
-                  </a:lnTo>
-                  <a:lnTo>
-                    <a:pt x="5443311" y="2867497"/>
-                  </a:lnTo>
-                  <a:lnTo>
-                    <a:pt x="5514934" y="2873932"/>
-                  </a:lnTo>
-                  <a:lnTo>
-                    <a:pt x="5586557" y="2880300"/>
-                  </a:lnTo>
-                  <a:lnTo>
-                    <a:pt x="5658179" y="2886602"/>
-                  </a:lnTo>
-                  <a:lnTo>
-                    <a:pt x="5729802" y="2892838"/>
-                  </a:lnTo>
-                  <a:lnTo>
-                    <a:pt x="5801424" y="2899008"/>
-                  </a:lnTo>
-                  <a:lnTo>
-                    <a:pt x="5873047" y="2905115"/>
-                  </a:lnTo>
-                  <a:lnTo>
-                    <a:pt x="5944669" y="2911157"/>
-                  </a:lnTo>
-                  <a:lnTo>
-                    <a:pt x="6016292" y="2917137"/>
-                  </a:lnTo>
-                  <a:lnTo>
-                    <a:pt x="6087914" y="2923054"/>
-                  </a:lnTo>
-                  <a:lnTo>
-                    <a:pt x="6159537" y="2928909"/>
-                  </a:lnTo>
-                  <a:lnTo>
-                    <a:pt x="6231159" y="2934703"/>
-                  </a:lnTo>
-                  <a:lnTo>
-                    <a:pt x="6302782" y="2940436"/>
-                  </a:lnTo>
-                  <a:lnTo>
-                    <a:pt x="6374404" y="2946110"/>
-                  </a:lnTo>
-                  <a:lnTo>
-                    <a:pt x="6446027" y="2951724"/>
-                  </a:lnTo>
-                  <a:lnTo>
-                    <a:pt x="6517649" y="2957280"/>
-                  </a:lnTo>
-                  <a:lnTo>
-                    <a:pt x="6589272" y="2962778"/>
-                  </a:lnTo>
-                  <a:lnTo>
-                    <a:pt x="6660894" y="2968218"/>
-                  </a:lnTo>
-                  <a:lnTo>
-                    <a:pt x="6732517" y="2973602"/>
-                  </a:lnTo>
-                  <a:lnTo>
-                    <a:pt x="6804139" y="2978929"/>
-                  </a:lnTo>
-                  <a:lnTo>
-                    <a:pt x="6875762" y="2984201"/>
-                  </a:lnTo>
-                  <a:lnTo>
-                    <a:pt x="6947385" y="2989417"/>
-                  </a:lnTo>
-                  <a:lnTo>
-                    <a:pt x="7019007" y="2994580"/>
-                  </a:lnTo>
-                  <a:lnTo>
-                    <a:pt x="7090630" y="2999688"/>
-                  </a:lnTo>
-                  <a:lnTo>
-                    <a:pt x="7090630" y="3396018"/>
-                  </a:lnTo>
-                  <a:lnTo>
-                    <a:pt x="7019007" y="3392091"/>
-                  </a:lnTo>
-                  <a:lnTo>
-                    <a:pt x="6947385" y="3387989"/>
-                  </a:lnTo>
-                  <a:lnTo>
-                    <a:pt x="6875762" y="3383702"/>
-                  </a:lnTo>
-                  <a:lnTo>
-                    <a:pt x="6804139" y="3379224"/>
-                  </a:lnTo>
-                  <a:lnTo>
-                    <a:pt x="6732517" y="3374546"/>
-                  </a:lnTo>
-                  <a:lnTo>
-                    <a:pt x="6660894" y="3369658"/>
-                  </a:lnTo>
-                  <a:lnTo>
-                    <a:pt x="6589272" y="3364551"/>
-                  </a:lnTo>
-                  <a:lnTo>
-                    <a:pt x="6517649" y="3359216"/>
-                  </a:lnTo>
-                  <a:lnTo>
-                    <a:pt x="6446027" y="3353641"/>
-                  </a:lnTo>
-                  <a:lnTo>
-                    <a:pt x="6374404" y="3347818"/>
-                  </a:lnTo>
-                  <a:lnTo>
-                    <a:pt x="6302782" y="3341733"/>
-                  </a:lnTo>
-                  <a:lnTo>
-                    <a:pt x="6231159" y="3335377"/>
-                  </a:lnTo>
-                  <a:lnTo>
-                    <a:pt x="6159537" y="3328735"/>
-                  </a:lnTo>
-                  <a:lnTo>
-                    <a:pt x="6087914" y="3321797"/>
-                  </a:lnTo>
-                  <a:lnTo>
-                    <a:pt x="6016292" y="3314548"/>
-                  </a:lnTo>
-                  <a:lnTo>
-                    <a:pt x="5944669" y="3306974"/>
-                  </a:lnTo>
-                  <a:lnTo>
-                    <a:pt x="5873047" y="3299061"/>
-                  </a:lnTo>
-                  <a:lnTo>
-                    <a:pt x="5801424" y="3290795"/>
-                  </a:lnTo>
-                  <a:lnTo>
-                    <a:pt x="5729802" y="3282158"/>
-                  </a:lnTo>
-                  <a:lnTo>
-                    <a:pt x="5658179" y="3273134"/>
-                  </a:lnTo>
-                  <a:lnTo>
-                    <a:pt x="5586557" y="3263707"/>
-                  </a:lnTo>
-                  <a:lnTo>
-                    <a:pt x="5514934" y="3253858"/>
-                  </a:lnTo>
-                  <a:lnTo>
-                    <a:pt x="5443311" y="3243568"/>
-                  </a:lnTo>
-                  <a:lnTo>
-                    <a:pt x="5371689" y="3232817"/>
-                  </a:lnTo>
-                  <a:lnTo>
-                    <a:pt x="5300066" y="3221585"/>
-                  </a:lnTo>
-                  <a:lnTo>
-                    <a:pt x="5228444" y="3209850"/>
-                  </a:lnTo>
-                  <a:lnTo>
-                    <a:pt x="5156821" y="3197590"/>
-                  </a:lnTo>
-                  <a:lnTo>
-                    <a:pt x="5085199" y="3184782"/>
-                  </a:lnTo>
-                  <a:lnTo>
-                    <a:pt x="5013576" y="3171399"/>
-                  </a:lnTo>
-                  <a:lnTo>
-                    <a:pt x="4941954" y="3157418"/>
-                  </a:lnTo>
-                  <a:lnTo>
-                    <a:pt x="4870331" y="3142811"/>
-                  </a:lnTo>
-                  <a:lnTo>
-                    <a:pt x="4798709" y="3127551"/>
-                  </a:lnTo>
-                  <a:lnTo>
-                    <a:pt x="4727086" y="3111607"/>
-                  </a:lnTo>
-                  <a:lnTo>
-                    <a:pt x="4655464" y="3094949"/>
-                  </a:lnTo>
-                  <a:lnTo>
-                    <a:pt x="4583841" y="3077546"/>
-                  </a:lnTo>
-                  <a:lnTo>
-                    <a:pt x="4512219" y="3059364"/>
-                  </a:lnTo>
-                  <a:lnTo>
-                    <a:pt x="4440596" y="3040368"/>
-                  </a:lnTo>
-                  <a:lnTo>
-                    <a:pt x="4368974" y="3020522"/>
-                  </a:lnTo>
-                  <a:lnTo>
-                    <a:pt x="4297351" y="2999787"/>
-                  </a:lnTo>
-                  <a:lnTo>
-                    <a:pt x="4225729" y="2978124"/>
-                  </a:lnTo>
-                  <a:lnTo>
-                    <a:pt x="4154106" y="2955492"/>
-                  </a:lnTo>
-                  <a:lnTo>
-                    <a:pt x="4082483" y="2931847"/>
-                  </a:lnTo>
-                  <a:lnTo>
-                    <a:pt x="4010861" y="2907143"/>
-                  </a:lnTo>
-                  <a:lnTo>
-                    <a:pt x="3939238" y="2881333"/>
-                  </a:lnTo>
-                  <a:lnTo>
-                    <a:pt x="3867616" y="2854368"/>
-                  </a:lnTo>
-                  <a:lnTo>
-                    <a:pt x="3795993" y="2826196"/>
-                  </a:lnTo>
-                  <a:lnTo>
-                    <a:pt x="3724371" y="2796763"/>
-                  </a:lnTo>
-                  <a:lnTo>
-                    <a:pt x="3652748" y="2766013"/>
-                  </a:lnTo>
-                  <a:lnTo>
-                    <a:pt x="3581126" y="2733886"/>
-                  </a:lnTo>
-                  <a:lnTo>
-                    <a:pt x="3509503" y="2700321"/>
-                  </a:lnTo>
-                  <a:lnTo>
-                    <a:pt x="3437881" y="2665254"/>
-                  </a:lnTo>
-                  <a:lnTo>
-                    <a:pt x="3366258" y="2648201"/>
-                  </a:lnTo>
-                  <a:lnTo>
-                    <a:pt x="3294636" y="2639384"/>
-                  </a:lnTo>
-                  <a:lnTo>
-                    <a:pt x="3223013" y="2630473"/>
-                  </a:lnTo>
-                  <a:lnTo>
-                    <a:pt x="3151391" y="2621468"/>
-                  </a:lnTo>
-                  <a:lnTo>
-                    <a:pt x="3079768" y="2612369"/>
-                  </a:lnTo>
-                  <a:lnTo>
-                    <a:pt x="3008146" y="2603173"/>
-                  </a:lnTo>
-                  <a:lnTo>
-                    <a:pt x="2936523" y="2593881"/>
-                  </a:lnTo>
-                  <a:lnTo>
-                    <a:pt x="2864901" y="2584490"/>
-                  </a:lnTo>
-                  <a:lnTo>
-                    <a:pt x="2793278" y="2575000"/>
-                  </a:lnTo>
-                  <a:lnTo>
-                    <a:pt x="2721655" y="2565410"/>
-                  </a:lnTo>
-                  <a:lnTo>
-                    <a:pt x="2650033" y="2555719"/>
-                  </a:lnTo>
-                  <a:lnTo>
-                    <a:pt x="2578410" y="2545925"/>
-                  </a:lnTo>
-                  <a:lnTo>
-                    <a:pt x="2506788" y="2536029"/>
-                  </a:lnTo>
-                  <a:lnTo>
-                    <a:pt x="2435165" y="2526027"/>
-                  </a:lnTo>
-                  <a:lnTo>
-                    <a:pt x="2363543" y="2515921"/>
-                  </a:lnTo>
-                  <a:lnTo>
-                    <a:pt x="2291920" y="2505707"/>
-                  </a:lnTo>
-                  <a:lnTo>
-                    <a:pt x="2220298" y="2495386"/>
-                  </a:lnTo>
-                  <a:lnTo>
-                    <a:pt x="2148675" y="2484956"/>
-                  </a:lnTo>
-                  <a:lnTo>
-                    <a:pt x="2077053" y="2474416"/>
-                  </a:lnTo>
-                  <a:lnTo>
-                    <a:pt x="2005430" y="2463764"/>
-                  </a:lnTo>
-                  <a:lnTo>
-                    <a:pt x="1933808" y="2453000"/>
-                  </a:lnTo>
-                  <a:lnTo>
-                    <a:pt x="1862185" y="2442123"/>
-                  </a:lnTo>
-                  <a:lnTo>
-                    <a:pt x="1790563" y="2431131"/>
-                  </a:lnTo>
-                  <a:lnTo>
-                    <a:pt x="1718940" y="2420023"/>
-                  </a:lnTo>
-                  <a:lnTo>
-                    <a:pt x="1647318" y="2408797"/>
-                  </a:lnTo>
-                  <a:lnTo>
-                    <a:pt x="1575695" y="2397453"/>
-                  </a:lnTo>
-                  <a:lnTo>
-                    <a:pt x="1504073" y="2385990"/>
-                  </a:lnTo>
-                  <a:lnTo>
-                    <a:pt x="1432450" y="2374405"/>
-                  </a:lnTo>
-                  <a:lnTo>
-                    <a:pt x="1360827" y="2362698"/>
-                  </a:lnTo>
-                  <a:lnTo>
-                    <a:pt x="1289205" y="2350868"/>
-                  </a:lnTo>
-                  <a:lnTo>
-                    <a:pt x="1217582" y="2338913"/>
-                  </a:lnTo>
-                  <a:lnTo>
-                    <a:pt x="1145960" y="2326831"/>
-                  </a:lnTo>
-                  <a:lnTo>
-                    <a:pt x="1074337" y="2314622"/>
-                  </a:lnTo>
-                  <a:lnTo>
-                    <a:pt x="1002715" y="2302285"/>
-                  </a:lnTo>
-                  <a:lnTo>
-                    <a:pt x="931092" y="2289817"/>
-                  </a:lnTo>
-                  <a:lnTo>
-                    <a:pt x="859470" y="2277217"/>
-                  </a:lnTo>
-                  <a:lnTo>
-                    <a:pt x="787847" y="2264485"/>
-                  </a:lnTo>
-                  <a:lnTo>
-                    <a:pt x="716225" y="2251618"/>
-                  </a:lnTo>
-                  <a:lnTo>
-                    <a:pt x="644602" y="2238615"/>
-                  </a:lnTo>
-                  <a:lnTo>
-                    <a:pt x="572980" y="2225476"/>
-                  </a:lnTo>
-                  <a:lnTo>
-                    <a:pt x="501357" y="2212197"/>
-                  </a:lnTo>
-                  <a:lnTo>
-                    <a:pt x="429735" y="2198778"/>
-                  </a:lnTo>
-                  <a:lnTo>
-                    <a:pt x="358112" y="2185218"/>
-                  </a:lnTo>
-                  <a:lnTo>
-                    <a:pt x="286490" y="2171515"/>
-                  </a:lnTo>
-                  <a:lnTo>
-                    <a:pt x="214867" y="2157667"/>
-                  </a:lnTo>
-                  <a:lnTo>
-                    <a:pt x="143245" y="2143673"/>
-                  </a:lnTo>
-                  <a:lnTo>
-                    <a:pt x="71622" y="2129531"/>
-                  </a:lnTo>
-                  <a:lnTo>
-                    <a:pt x="0" y="2115240"/>
+                    <a:pt x="1145960" y="92725"/>
+                  </a:lnTo>
+                  <a:lnTo>
+                    <a:pt x="1217582" y="240075"/>
+                  </a:lnTo>
+                  <a:lnTo>
+                    <a:pt x="1289205" y="381023"/>
+                  </a:lnTo>
+                  <a:lnTo>
+                    <a:pt x="1360827" y="515846"/>
+                  </a:lnTo>
+                  <a:lnTo>
+                    <a:pt x="1432450" y="644811"/>
+                  </a:lnTo>
+                  <a:lnTo>
+                    <a:pt x="1504073" y="768171"/>
+                  </a:lnTo>
+                  <a:lnTo>
+                    <a:pt x="1575695" y="886172"/>
+                  </a:lnTo>
+                  <a:lnTo>
+                    <a:pt x="1647318" y="999045"/>
+                  </a:lnTo>
+                  <a:lnTo>
+                    <a:pt x="1718940" y="1107013"/>
+                  </a:lnTo>
+                  <a:lnTo>
+                    <a:pt x="1790563" y="1210289"/>
+                  </a:lnTo>
+                  <a:lnTo>
+                    <a:pt x="1862185" y="1309078"/>
+                  </a:lnTo>
+                  <a:lnTo>
+                    <a:pt x="1933808" y="1403574"/>
+                  </a:lnTo>
+                  <a:lnTo>
+                    <a:pt x="2005430" y="1493964"/>
+                  </a:lnTo>
+                  <a:lnTo>
+                    <a:pt x="2077053" y="1580427"/>
+                  </a:lnTo>
+                  <a:lnTo>
+                    <a:pt x="2148675" y="1663132"/>
+                  </a:lnTo>
+                  <a:lnTo>
+                    <a:pt x="2220298" y="1742243"/>
+                  </a:lnTo>
+                  <a:lnTo>
+                    <a:pt x="2291920" y="1817917"/>
+                  </a:lnTo>
+                  <a:lnTo>
+                    <a:pt x="2363543" y="1890303"/>
+                  </a:lnTo>
+                  <a:lnTo>
+                    <a:pt x="2435165" y="1959543"/>
+                  </a:lnTo>
+                  <a:lnTo>
+                    <a:pt x="2506788" y="2025774"/>
+                  </a:lnTo>
+                  <a:lnTo>
+                    <a:pt x="2578410" y="2089128"/>
+                  </a:lnTo>
+                  <a:lnTo>
+                    <a:pt x="2650033" y="2149728"/>
+                  </a:lnTo>
+                  <a:lnTo>
+                    <a:pt x="2721655" y="2207696"/>
+                  </a:lnTo>
+                  <a:lnTo>
+                    <a:pt x="2793278" y="2263144"/>
+                  </a:lnTo>
+                  <a:lnTo>
+                    <a:pt x="2864901" y="2316183"/>
+                  </a:lnTo>
+                  <a:lnTo>
+                    <a:pt x="2936523" y="2366917"/>
+                  </a:lnTo>
+                  <a:lnTo>
+                    <a:pt x="3008146" y="2415447"/>
+                  </a:lnTo>
+                  <a:lnTo>
+                    <a:pt x="3079768" y="2461868"/>
+                  </a:lnTo>
+                  <a:lnTo>
+                    <a:pt x="3151391" y="2506272"/>
+                  </a:lnTo>
+                  <a:lnTo>
+                    <a:pt x="3223013" y="2548746"/>
+                  </a:lnTo>
+                  <a:lnTo>
+                    <a:pt x="3294636" y="2589375"/>
+                  </a:lnTo>
+                  <a:lnTo>
+                    <a:pt x="3366258" y="2628238"/>
+                  </a:lnTo>
+                  <a:lnTo>
+                    <a:pt x="3437881" y="2657137"/>
+                  </a:lnTo>
+                  <a:lnTo>
+                    <a:pt x="3509503" y="2666453"/>
+                  </a:lnTo>
+                  <a:lnTo>
+                    <a:pt x="3581126" y="2675664"/>
+                  </a:lnTo>
+                  <a:lnTo>
+                    <a:pt x="3652748" y="2684772"/>
+                  </a:lnTo>
+                  <a:lnTo>
+                    <a:pt x="3724371" y="2693777"/>
+                  </a:lnTo>
+                  <a:lnTo>
+                    <a:pt x="3795993" y="2702680"/>
+                  </a:lnTo>
+                  <a:lnTo>
+                    <a:pt x="3867616" y="2711483"/>
+                  </a:lnTo>
+                  <a:lnTo>
+                    <a:pt x="3939238" y="2720187"/>
+                  </a:lnTo>
+                  <a:lnTo>
+                    <a:pt x="4010861" y="2728793"/>
+                  </a:lnTo>
+                  <a:lnTo>
+                    <a:pt x="4082483" y="2737301"/>
+                  </a:lnTo>
+                  <a:lnTo>
+                    <a:pt x="4154106" y="2745714"/>
+                  </a:lnTo>
+                  <a:lnTo>
+                    <a:pt x="4225729" y="2754032"/>
+                  </a:lnTo>
+                  <a:lnTo>
+                    <a:pt x="4297351" y="2762256"/>
+                  </a:lnTo>
+                  <a:lnTo>
+                    <a:pt x="4368974" y="2770388"/>
+                  </a:lnTo>
+                  <a:lnTo>
+                    <a:pt x="4440596" y="2778428"/>
+                  </a:lnTo>
+                  <a:lnTo>
+                    <a:pt x="4512219" y="2786377"/>
+                  </a:lnTo>
+                  <a:lnTo>
+                    <a:pt x="4583841" y="2794237"/>
+                  </a:lnTo>
+                  <a:lnTo>
+                    <a:pt x="4655464" y="2802008"/>
+                  </a:lnTo>
+                  <a:lnTo>
+                    <a:pt x="4727086" y="2809692"/>
+                  </a:lnTo>
+                  <a:lnTo>
+                    <a:pt x="4798709" y="2817288"/>
+                  </a:lnTo>
+                  <a:lnTo>
+                    <a:pt x="4870331" y="2824800"/>
+                  </a:lnTo>
+                  <a:lnTo>
+                    <a:pt x="4941954" y="2832226"/>
+                  </a:lnTo>
+                  <a:lnTo>
+                    <a:pt x="5013576" y="2839569"/>
+                  </a:lnTo>
+                  <a:lnTo>
+                    <a:pt x="5085199" y="2846830"/>
+                  </a:lnTo>
+                  <a:lnTo>
+                    <a:pt x="5156821" y="2854008"/>
+                  </a:lnTo>
+                  <a:lnTo>
+                    <a:pt x="5228444" y="2861105"/>
+                  </a:lnTo>
+                  <a:lnTo>
+                    <a:pt x="5300066" y="2868123"/>
+                  </a:lnTo>
+                  <a:lnTo>
+                    <a:pt x="5371689" y="2875061"/>
+                  </a:lnTo>
+                  <a:lnTo>
+                    <a:pt x="5443311" y="2881922"/>
+                  </a:lnTo>
+                  <a:lnTo>
+                    <a:pt x="5514934" y="2888704"/>
+                  </a:lnTo>
+                  <a:lnTo>
+                    <a:pt x="5586557" y="2895411"/>
+                  </a:lnTo>
+                  <a:lnTo>
+                    <a:pt x="5658179" y="2902042"/>
+                  </a:lnTo>
+                  <a:lnTo>
+                    <a:pt x="5729802" y="2908598"/>
+                  </a:lnTo>
+                  <a:lnTo>
+                    <a:pt x="5801424" y="2915080"/>
+                  </a:lnTo>
+                  <a:lnTo>
+                    <a:pt x="5873047" y="2921489"/>
+                  </a:lnTo>
+                  <a:lnTo>
+                    <a:pt x="5944669" y="2927826"/>
+                  </a:lnTo>
+                  <a:lnTo>
+                    <a:pt x="6016292" y="2934092"/>
+                  </a:lnTo>
+                  <a:lnTo>
+                    <a:pt x="6087914" y="2940286"/>
+                  </a:lnTo>
+                  <a:lnTo>
+                    <a:pt x="6159537" y="2946412"/>
+                  </a:lnTo>
+                  <a:lnTo>
+                    <a:pt x="6231159" y="2952468"/>
+                  </a:lnTo>
+                  <a:lnTo>
+                    <a:pt x="6302782" y="2958455"/>
+                  </a:lnTo>
+                  <a:lnTo>
+                    <a:pt x="6374404" y="2964376"/>
+                  </a:lnTo>
+                  <a:lnTo>
+                    <a:pt x="6446027" y="2970229"/>
+                  </a:lnTo>
+                  <a:lnTo>
+                    <a:pt x="6517649" y="2976017"/>
+                  </a:lnTo>
+                  <a:lnTo>
+                    <a:pt x="6589272" y="2981739"/>
+                  </a:lnTo>
+                  <a:lnTo>
+                    <a:pt x="6660894" y="2987397"/>
+                  </a:lnTo>
+                  <a:lnTo>
+                    <a:pt x="6732517" y="2992991"/>
+                  </a:lnTo>
+                  <a:lnTo>
+                    <a:pt x="6804139" y="2998522"/>
+                  </a:lnTo>
+                  <a:lnTo>
+                    <a:pt x="6875762" y="3003991"/>
+                  </a:lnTo>
+                  <a:lnTo>
+                    <a:pt x="6947385" y="3009398"/>
+                  </a:lnTo>
+                  <a:lnTo>
+                    <a:pt x="7019007" y="3014744"/>
+                  </a:lnTo>
+                  <a:lnTo>
+                    <a:pt x="7090630" y="3020030"/>
+                  </a:lnTo>
+                  <a:lnTo>
+                    <a:pt x="7090630" y="3398838"/>
+                  </a:lnTo>
+                  <a:lnTo>
+                    <a:pt x="7019007" y="3394981"/>
+                  </a:lnTo>
+                  <a:lnTo>
+                    <a:pt x="6947385" y="3390949"/>
+                  </a:lnTo>
+                  <a:lnTo>
+                    <a:pt x="6875762" y="3386733"/>
+                  </a:lnTo>
+                  <a:lnTo>
+                    <a:pt x="6804139" y="3382326"/>
+                  </a:lnTo>
+                  <a:lnTo>
+                    <a:pt x="6732517" y="3377719"/>
+                  </a:lnTo>
+                  <a:lnTo>
+                    <a:pt x="6660894" y="3372903"/>
+                  </a:lnTo>
+                  <a:lnTo>
+                    <a:pt x="6589272" y="3367867"/>
+                  </a:lnTo>
+                  <a:lnTo>
+                    <a:pt x="6517649" y="3362603"/>
+                  </a:lnTo>
+                  <a:lnTo>
+                    <a:pt x="6446027" y="3357100"/>
+                  </a:lnTo>
+                  <a:lnTo>
+                    <a:pt x="6374404" y="3351347"/>
+                  </a:lnTo>
+                  <a:lnTo>
+                    <a:pt x="6302782" y="3345332"/>
+                  </a:lnTo>
+                  <a:lnTo>
+                    <a:pt x="6231159" y="3339045"/>
+                  </a:lnTo>
+                  <a:lnTo>
+                    <a:pt x="6159537" y="3332471"/>
+                  </a:lnTo>
+                  <a:lnTo>
+                    <a:pt x="6087914" y="3325599"/>
+                  </a:lnTo>
+                  <a:lnTo>
+                    <a:pt x="6016292" y="3318415"/>
+                  </a:lnTo>
+                  <a:lnTo>
+                    <a:pt x="5944669" y="3310904"/>
+                  </a:lnTo>
+                  <a:lnTo>
+                    <a:pt x="5873047" y="3303053"/>
+                  </a:lnTo>
+                  <a:lnTo>
+                    <a:pt x="5801424" y="3294844"/>
+                  </a:lnTo>
+                  <a:lnTo>
+                    <a:pt x="5729802" y="3286263"/>
+                  </a:lnTo>
+                  <a:lnTo>
+                    <a:pt x="5658179" y="3277292"/>
+                  </a:lnTo>
+                  <a:lnTo>
+                    <a:pt x="5586557" y="3267913"/>
+                  </a:lnTo>
+                  <a:lnTo>
+                    <a:pt x="5514934" y="3258109"/>
+                  </a:lnTo>
+                  <a:lnTo>
+                    <a:pt x="5443311" y="3247859"/>
+                  </a:lnTo>
+                  <a:lnTo>
+                    <a:pt x="5371689" y="3237143"/>
+                  </a:lnTo>
+                  <a:lnTo>
+                    <a:pt x="5300066" y="3225940"/>
+                  </a:lnTo>
+                  <a:lnTo>
+                    <a:pt x="5228444" y="3214229"/>
+                  </a:lnTo>
+                  <a:lnTo>
+                    <a:pt x="5156821" y="3201986"/>
+                  </a:lnTo>
+                  <a:lnTo>
+                    <a:pt x="5085199" y="3189186"/>
+                  </a:lnTo>
+                  <a:lnTo>
+                    <a:pt x="5013576" y="3175805"/>
+                  </a:lnTo>
+                  <a:lnTo>
+                    <a:pt x="4941954" y="3161816"/>
+                  </a:lnTo>
+                  <a:lnTo>
+                    <a:pt x="4870331" y="3147192"/>
+                  </a:lnTo>
+                  <a:lnTo>
+                    <a:pt x="4798709" y="3131903"/>
+                  </a:lnTo>
+                  <a:lnTo>
+                    <a:pt x="4727086" y="3115920"/>
+                  </a:lnTo>
+                  <a:lnTo>
+                    <a:pt x="4655464" y="3099211"/>
+                  </a:lnTo>
+                  <a:lnTo>
+                    <a:pt x="4583841" y="3081742"/>
+                  </a:lnTo>
+                  <a:lnTo>
+                    <a:pt x="4512219" y="3063481"/>
+                  </a:lnTo>
+                  <a:lnTo>
+                    <a:pt x="4440596" y="3044389"/>
+                  </a:lnTo>
+                  <a:lnTo>
+                    <a:pt x="4368974" y="3024430"/>
+                  </a:lnTo>
+                  <a:lnTo>
+                    <a:pt x="4297351" y="3003565"/>
+                  </a:lnTo>
+                  <a:lnTo>
+                    <a:pt x="4225729" y="2981752"/>
+                  </a:lnTo>
+                  <a:lnTo>
+                    <a:pt x="4154106" y="2958947"/>
+                  </a:lnTo>
+                  <a:lnTo>
+                    <a:pt x="4082483" y="2935107"/>
+                  </a:lnTo>
+                  <a:lnTo>
+                    <a:pt x="4010861" y="2910184"/>
+                  </a:lnTo>
+                  <a:lnTo>
+                    <a:pt x="3939238" y="2884129"/>
+                  </a:lnTo>
+                  <a:lnTo>
+                    <a:pt x="3867616" y="2856890"/>
+                  </a:lnTo>
+                  <a:lnTo>
+                    <a:pt x="3795993" y="2828414"/>
+                  </a:lnTo>
+                  <a:lnTo>
+                    <a:pt x="3724371" y="2798644"/>
+                  </a:lnTo>
+                  <a:lnTo>
+                    <a:pt x="3652748" y="2767522"/>
+                  </a:lnTo>
+                  <a:lnTo>
+                    <a:pt x="3581126" y="2734986"/>
+                  </a:lnTo>
+                  <a:lnTo>
+                    <a:pt x="3509503" y="2700972"/>
+                  </a:lnTo>
+                  <a:lnTo>
+                    <a:pt x="3437881" y="2665413"/>
+                  </a:lnTo>
+                  <a:lnTo>
+                    <a:pt x="3366258" y="2647714"/>
+                  </a:lnTo>
+                  <a:lnTo>
+                    <a:pt x="3294636" y="2638184"/>
+                  </a:lnTo>
+                  <a:lnTo>
+                    <a:pt x="3223013" y="2628546"/>
+                  </a:lnTo>
+                  <a:lnTo>
+                    <a:pt x="3151391" y="2618797"/>
+                  </a:lnTo>
+                  <a:lnTo>
+                    <a:pt x="3079768" y="2608938"/>
+                  </a:lnTo>
+                  <a:lnTo>
+                    <a:pt x="3008146" y="2598966"/>
+                  </a:lnTo>
+                  <a:lnTo>
+                    <a:pt x="2936523" y="2588880"/>
+                  </a:lnTo>
+                  <a:lnTo>
+                    <a:pt x="2864901" y="2578680"/>
+                  </a:lnTo>
+                  <a:lnTo>
+                    <a:pt x="2793278" y="2568363"/>
+                  </a:lnTo>
+                  <a:lnTo>
+                    <a:pt x="2721655" y="2557928"/>
+                  </a:lnTo>
+                  <a:lnTo>
+                    <a:pt x="2650033" y="2547375"/>
+                  </a:lnTo>
+                  <a:lnTo>
+                    <a:pt x="2578410" y="2536701"/>
+                  </a:lnTo>
+                  <a:lnTo>
+                    <a:pt x="2506788" y="2525906"/>
+                  </a:lnTo>
+                  <a:lnTo>
+                    <a:pt x="2435165" y="2514988"/>
+                  </a:lnTo>
+                  <a:lnTo>
+                    <a:pt x="2363543" y="2503945"/>
+                  </a:lnTo>
+                  <a:lnTo>
+                    <a:pt x="2291920" y="2492776"/>
+                  </a:lnTo>
+                  <a:lnTo>
+                    <a:pt x="2220298" y="2481480"/>
+                  </a:lnTo>
+                  <a:lnTo>
+                    <a:pt x="2148675" y="2470055"/>
+                  </a:lnTo>
+                  <a:lnTo>
+                    <a:pt x="2077053" y="2458500"/>
+                  </a:lnTo>
+                  <a:lnTo>
+                    <a:pt x="2005430" y="2446813"/>
+                  </a:lnTo>
+                  <a:lnTo>
+                    <a:pt x="1933808" y="2434993"/>
+                  </a:lnTo>
+                  <a:lnTo>
+                    <a:pt x="1862185" y="2423039"/>
+                  </a:lnTo>
+                  <a:lnTo>
+                    <a:pt x="1790563" y="2410948"/>
+                  </a:lnTo>
+                  <a:lnTo>
+                    <a:pt x="1718940" y="2398719"/>
+                  </a:lnTo>
+                  <a:lnTo>
+                    <a:pt x="1647318" y="2386351"/>
+                  </a:lnTo>
+                  <a:lnTo>
+                    <a:pt x="1575695" y="2373841"/>
+                  </a:lnTo>
+                  <a:lnTo>
+                    <a:pt x="1504073" y="2361190"/>
+                  </a:lnTo>
+                  <a:lnTo>
+                    <a:pt x="1432450" y="2348394"/>
+                  </a:lnTo>
+                  <a:lnTo>
+                    <a:pt x="1360827" y="2335452"/>
+                  </a:lnTo>
+                  <a:lnTo>
+                    <a:pt x="1289205" y="2322362"/>
+                  </a:lnTo>
+                  <a:lnTo>
+                    <a:pt x="1217582" y="2309124"/>
+                  </a:lnTo>
+                  <a:lnTo>
+                    <a:pt x="1145960" y="2295734"/>
+                  </a:lnTo>
+                  <a:lnTo>
+                    <a:pt x="1074337" y="2282192"/>
+                  </a:lnTo>
+                  <a:lnTo>
+                    <a:pt x="1002715" y="2268496"/>
+                  </a:lnTo>
+                  <a:lnTo>
+                    <a:pt x="931092" y="2254643"/>
+                  </a:lnTo>
+                  <a:lnTo>
+                    <a:pt x="859470" y="2240633"/>
+                  </a:lnTo>
+                  <a:lnTo>
+                    <a:pt x="787847" y="2226462"/>
+                  </a:lnTo>
+                  <a:lnTo>
+                    <a:pt x="716225" y="2212131"/>
+                  </a:lnTo>
+                  <a:lnTo>
+                    <a:pt x="644602" y="2197635"/>
+                  </a:lnTo>
+                  <a:lnTo>
+                    <a:pt x="572980" y="2182975"/>
+                  </a:lnTo>
+                  <a:lnTo>
+                    <a:pt x="501357" y="2168148"/>
+                  </a:lnTo>
+                  <a:lnTo>
+                    <a:pt x="429735" y="2153151"/>
+                  </a:lnTo>
+                  <a:lnTo>
+                    <a:pt x="358112" y="2137984"/>
+                  </a:lnTo>
+                  <a:lnTo>
+                    <a:pt x="286490" y="2122643"/>
+                  </a:lnTo>
+                  <a:lnTo>
+                    <a:pt x="214867" y="2107128"/>
+                  </a:lnTo>
+                  <a:lnTo>
+                    <a:pt x="143245" y="2091436"/>
+                  </a:lnTo>
+                  <a:lnTo>
+                    <a:pt x="71622" y="2075565"/>
+                  </a:lnTo>
+                  <a:lnTo>
+                    <a:pt x="0" y="2059513"/>
                   </a:lnTo>
                   <a:close/>
                 </a:path>
@@ -3548,270 +3545,267 @@
           </p:nvSpPr>
           <p:spPr>
             <a:xfrm>
-              <a:off x="2240976" y="2073503"/>
-              <a:ext cx="6021702" cy="2999688"/>
+              <a:off x="2274897" y="2073503"/>
+              <a:ext cx="5987782" cy="3020030"/>
             </a:xfrm>
             <a:custGeom>
               <a:avLst/>
               <a:pathLst>
-                <a:path w="6021702" h="2999688">
+                <a:path w="5987782" h="3020030">
                   <a:moveTo>
                     <a:pt x="0" y="0"/>
                   </a:moveTo>
                   <a:lnTo>
-                    <a:pt x="5410" y="11740"/>
-                  </a:lnTo>
-                  <a:lnTo>
-                    <a:pt x="77033" y="160494"/>
-                  </a:lnTo>
-                  <a:lnTo>
-                    <a:pt x="148655" y="302874"/>
-                  </a:lnTo>
-                  <a:lnTo>
-                    <a:pt x="220278" y="439155"/>
-                  </a:lnTo>
-                  <a:lnTo>
-                    <a:pt x="291900" y="569596"/>
-                  </a:lnTo>
-                  <a:lnTo>
-                    <a:pt x="363523" y="694449"/>
-                  </a:lnTo>
-                  <a:lnTo>
-                    <a:pt x="435145" y="813953"/>
-                  </a:lnTo>
-                  <a:lnTo>
-                    <a:pt x="506768" y="928337"/>
-                  </a:lnTo>
-                  <a:lnTo>
-                    <a:pt x="578390" y="1037820"/>
-                  </a:lnTo>
-                  <a:lnTo>
-                    <a:pt x="650013" y="1142613"/>
-                  </a:lnTo>
-                  <a:lnTo>
-                    <a:pt x="721636" y="1242916"/>
-                  </a:lnTo>
-                  <a:lnTo>
-                    <a:pt x="793258" y="1338921"/>
-                  </a:lnTo>
-                  <a:lnTo>
-                    <a:pt x="864881" y="1430814"/>
-                  </a:lnTo>
-                  <a:lnTo>
-                    <a:pt x="936503" y="1518769"/>
-                  </a:lnTo>
-                  <a:lnTo>
-                    <a:pt x="1008126" y="1602956"/>
-                  </a:lnTo>
-                  <a:lnTo>
-                    <a:pt x="1079748" y="1683536"/>
-                  </a:lnTo>
-                  <a:lnTo>
-                    <a:pt x="1151371" y="1760664"/>
-                  </a:lnTo>
-                  <a:lnTo>
-                    <a:pt x="1222993" y="1834487"/>
-                  </a:lnTo>
-                  <a:lnTo>
-                    <a:pt x="1294616" y="1905147"/>
-                  </a:lnTo>
-                  <a:lnTo>
-                    <a:pt x="1366238" y="1972781"/>
-                  </a:lnTo>
-                  <a:lnTo>
-                    <a:pt x="1437861" y="2037516"/>
-                  </a:lnTo>
-                  <a:lnTo>
-                    <a:pt x="1509483" y="2099478"/>
-                  </a:lnTo>
-                  <a:lnTo>
-                    <a:pt x="1581106" y="2158785"/>
-                  </a:lnTo>
-                  <a:lnTo>
-                    <a:pt x="1652728" y="2215551"/>
-                  </a:lnTo>
-                  <a:lnTo>
-                    <a:pt x="1724351" y="2269886"/>
-                  </a:lnTo>
-                  <a:lnTo>
-                    <a:pt x="1795973" y="2321892"/>
-                  </a:lnTo>
-                  <a:lnTo>
-                    <a:pt x="1867596" y="2371670"/>
-                  </a:lnTo>
-                  <a:lnTo>
-                    <a:pt x="1939218" y="2419316"/>
-                  </a:lnTo>
-                  <a:lnTo>
-                    <a:pt x="2010841" y="2464920"/>
-                  </a:lnTo>
-                  <a:lnTo>
-                    <a:pt x="2082464" y="2508570"/>
-                  </a:lnTo>
-                  <a:lnTo>
-                    <a:pt x="2154086" y="2550350"/>
-                  </a:lnTo>
-                  <a:lnTo>
-                    <a:pt x="2225709" y="2590340"/>
-                  </a:lnTo>
-                  <a:lnTo>
-                    <a:pt x="2297331" y="2628617"/>
-                  </a:lnTo>
-                  <a:lnTo>
-                    <a:pt x="2368954" y="2656926"/>
-                  </a:lnTo>
-                  <a:lnTo>
-                    <a:pt x="2440576" y="2665561"/>
-                  </a:lnTo>
-                  <a:lnTo>
-                    <a:pt x="2512199" y="2674105"/>
-                  </a:lnTo>
-                  <a:lnTo>
-                    <a:pt x="2583821" y="2682560"/>
-                  </a:lnTo>
-                  <a:lnTo>
-                    <a:pt x="2655444" y="2690926"/>
-                  </a:lnTo>
-                  <a:lnTo>
-                    <a:pt x="2727066" y="2699206"/>
-                  </a:lnTo>
-                  <a:lnTo>
-                    <a:pt x="2798689" y="2707398"/>
-                  </a:lnTo>
-                  <a:lnTo>
-                    <a:pt x="2870311" y="2715506"/>
-                  </a:lnTo>
-                  <a:lnTo>
-                    <a:pt x="2941934" y="2723528"/>
-                  </a:lnTo>
-                  <a:lnTo>
-                    <a:pt x="3013556" y="2731467"/>
-                  </a:lnTo>
-                  <a:lnTo>
-                    <a:pt x="3085179" y="2739323"/>
-                  </a:lnTo>
-                  <a:lnTo>
-                    <a:pt x="3156801" y="2747097"/>
-                  </a:lnTo>
-                  <a:lnTo>
-                    <a:pt x="3228424" y="2754789"/>
-                  </a:lnTo>
-                  <a:lnTo>
-                    <a:pt x="3300046" y="2762402"/>
-                  </a:lnTo>
-                  <a:lnTo>
-                    <a:pt x="3371669" y="2769934"/>
-                  </a:lnTo>
-                  <a:lnTo>
-                    <a:pt x="3443292" y="2777389"/>
-                  </a:lnTo>
-                  <a:lnTo>
-                    <a:pt x="3514914" y="2784765"/>
-                  </a:lnTo>
-                  <a:lnTo>
-                    <a:pt x="3586537" y="2792064"/>
-                  </a:lnTo>
-                  <a:lnTo>
-                    <a:pt x="3658159" y="2799287"/>
-                  </a:lnTo>
-                  <a:lnTo>
-                    <a:pt x="3729782" y="2806435"/>
-                  </a:lnTo>
-                  <a:lnTo>
-                    <a:pt x="3801404" y="2813508"/>
-                  </a:lnTo>
-                  <a:lnTo>
-                    <a:pt x="3873027" y="2820507"/>
-                  </a:lnTo>
-                  <a:lnTo>
-                    <a:pt x="3944649" y="2827433"/>
-                  </a:lnTo>
-                  <a:lnTo>
-                    <a:pt x="4016272" y="2834287"/>
-                  </a:lnTo>
-                  <a:lnTo>
-                    <a:pt x="4087894" y="2841069"/>
-                  </a:lnTo>
-                  <a:lnTo>
-                    <a:pt x="4159517" y="2847780"/>
-                  </a:lnTo>
-                  <a:lnTo>
-                    <a:pt x="4231139" y="2854421"/>
-                  </a:lnTo>
-                  <a:lnTo>
-                    <a:pt x="4302762" y="2860993"/>
-                  </a:lnTo>
-                  <a:lnTo>
-                    <a:pt x="4374384" y="2867497"/>
-                  </a:lnTo>
-                  <a:lnTo>
-                    <a:pt x="4446007" y="2873932"/>
-                  </a:lnTo>
-                  <a:lnTo>
-                    <a:pt x="4517629" y="2880300"/>
-                  </a:lnTo>
-                  <a:lnTo>
-                    <a:pt x="4589252" y="2886602"/>
-                  </a:lnTo>
-                  <a:lnTo>
-                    <a:pt x="4660874" y="2892838"/>
-                  </a:lnTo>
-                  <a:lnTo>
-                    <a:pt x="4732497" y="2899008"/>
-                  </a:lnTo>
-                  <a:lnTo>
-                    <a:pt x="4804119" y="2905115"/>
-                  </a:lnTo>
-                  <a:lnTo>
-                    <a:pt x="4875742" y="2911157"/>
-                  </a:lnTo>
-                  <a:lnTo>
-                    <a:pt x="4947365" y="2917137"/>
-                  </a:lnTo>
-                  <a:lnTo>
-                    <a:pt x="5018987" y="2923054"/>
-                  </a:lnTo>
-                  <a:lnTo>
-                    <a:pt x="5090610" y="2928909"/>
-                  </a:lnTo>
-                  <a:lnTo>
-                    <a:pt x="5162232" y="2934703"/>
-                  </a:lnTo>
-                  <a:lnTo>
-                    <a:pt x="5233855" y="2940436"/>
-                  </a:lnTo>
-                  <a:lnTo>
-                    <a:pt x="5305477" y="2946110"/>
-                  </a:lnTo>
-                  <a:lnTo>
-                    <a:pt x="5377100" y="2951724"/>
-                  </a:lnTo>
-                  <a:lnTo>
-                    <a:pt x="5448722" y="2957280"/>
-                  </a:lnTo>
-                  <a:lnTo>
-                    <a:pt x="5520345" y="2962778"/>
-                  </a:lnTo>
-                  <a:lnTo>
-                    <a:pt x="5591967" y="2968218"/>
-                  </a:lnTo>
-                  <a:lnTo>
-                    <a:pt x="5663590" y="2973602"/>
-                  </a:lnTo>
-                  <a:lnTo>
-                    <a:pt x="5735212" y="2978929"/>
-                  </a:lnTo>
-                  <a:lnTo>
-                    <a:pt x="5806835" y="2984201"/>
-                  </a:lnTo>
-                  <a:lnTo>
-                    <a:pt x="5878457" y="2989417"/>
-                  </a:lnTo>
-                  <a:lnTo>
-                    <a:pt x="5950080" y="2994580"/>
-                  </a:lnTo>
-                  <a:lnTo>
-                    <a:pt x="6021702" y="2999688"/>
+                    <a:pt x="43112" y="92725"/>
+                  </a:lnTo>
+                  <a:lnTo>
+                    <a:pt x="114734" y="240075"/>
+                  </a:lnTo>
+                  <a:lnTo>
+                    <a:pt x="186357" y="381023"/>
+                  </a:lnTo>
+                  <a:lnTo>
+                    <a:pt x="257979" y="515846"/>
+                  </a:lnTo>
+                  <a:lnTo>
+                    <a:pt x="329602" y="644811"/>
+                  </a:lnTo>
+                  <a:lnTo>
+                    <a:pt x="401225" y="768171"/>
+                  </a:lnTo>
+                  <a:lnTo>
+                    <a:pt x="472847" y="886172"/>
+                  </a:lnTo>
+                  <a:lnTo>
+                    <a:pt x="544470" y="999045"/>
+                  </a:lnTo>
+                  <a:lnTo>
+                    <a:pt x="616092" y="1107013"/>
+                  </a:lnTo>
+                  <a:lnTo>
+                    <a:pt x="687715" y="1210289"/>
+                  </a:lnTo>
+                  <a:lnTo>
+                    <a:pt x="759337" y="1309078"/>
+                  </a:lnTo>
+                  <a:lnTo>
+                    <a:pt x="830960" y="1403574"/>
+                  </a:lnTo>
+                  <a:lnTo>
+                    <a:pt x="902582" y="1493964"/>
+                  </a:lnTo>
+                  <a:lnTo>
+                    <a:pt x="974205" y="1580427"/>
+                  </a:lnTo>
+                  <a:lnTo>
+                    <a:pt x="1045827" y="1663132"/>
+                  </a:lnTo>
+                  <a:lnTo>
+                    <a:pt x="1117450" y="1742243"/>
+                  </a:lnTo>
+                  <a:lnTo>
+                    <a:pt x="1189072" y="1817917"/>
+                  </a:lnTo>
+                  <a:lnTo>
+                    <a:pt x="1260695" y="1890303"/>
+                  </a:lnTo>
+                  <a:lnTo>
+                    <a:pt x="1332317" y="1959543"/>
+                  </a:lnTo>
+                  <a:lnTo>
+                    <a:pt x="1403940" y="2025774"/>
+                  </a:lnTo>
+                  <a:lnTo>
+                    <a:pt x="1475562" y="2089128"/>
+                  </a:lnTo>
+                  <a:lnTo>
+                    <a:pt x="1547185" y="2149728"/>
+                  </a:lnTo>
+                  <a:lnTo>
+                    <a:pt x="1618807" y="2207696"/>
+                  </a:lnTo>
+                  <a:lnTo>
+                    <a:pt x="1690430" y="2263144"/>
+                  </a:lnTo>
+                  <a:lnTo>
+                    <a:pt x="1762053" y="2316183"/>
+                  </a:lnTo>
+                  <a:lnTo>
+                    <a:pt x="1833675" y="2366917"/>
+                  </a:lnTo>
+                  <a:lnTo>
+                    <a:pt x="1905298" y="2415447"/>
+                  </a:lnTo>
+                  <a:lnTo>
+                    <a:pt x="1976920" y="2461868"/>
+                  </a:lnTo>
+                  <a:lnTo>
+                    <a:pt x="2048543" y="2506272"/>
+                  </a:lnTo>
+                  <a:lnTo>
+                    <a:pt x="2120165" y="2548746"/>
+                  </a:lnTo>
+                  <a:lnTo>
+                    <a:pt x="2191788" y="2589375"/>
+                  </a:lnTo>
+                  <a:lnTo>
+                    <a:pt x="2263410" y="2628238"/>
+                  </a:lnTo>
+                  <a:lnTo>
+                    <a:pt x="2335033" y="2657137"/>
+                  </a:lnTo>
+                  <a:lnTo>
+                    <a:pt x="2406655" y="2666453"/>
+                  </a:lnTo>
+                  <a:lnTo>
+                    <a:pt x="2478278" y="2675664"/>
+                  </a:lnTo>
+                  <a:lnTo>
+                    <a:pt x="2549900" y="2684772"/>
+                  </a:lnTo>
+                  <a:lnTo>
+                    <a:pt x="2621523" y="2693777"/>
+                  </a:lnTo>
+                  <a:lnTo>
+                    <a:pt x="2693145" y="2702680"/>
+                  </a:lnTo>
+                  <a:lnTo>
+                    <a:pt x="2764768" y="2711483"/>
+                  </a:lnTo>
+                  <a:lnTo>
+                    <a:pt x="2836390" y="2720187"/>
+                  </a:lnTo>
+                  <a:lnTo>
+                    <a:pt x="2908013" y="2728793"/>
+                  </a:lnTo>
+                  <a:lnTo>
+                    <a:pt x="2979635" y="2737301"/>
+                  </a:lnTo>
+                  <a:lnTo>
+                    <a:pt x="3051258" y="2745714"/>
+                  </a:lnTo>
+                  <a:lnTo>
+                    <a:pt x="3122881" y="2754032"/>
+                  </a:lnTo>
+                  <a:lnTo>
+                    <a:pt x="3194503" y="2762256"/>
+                  </a:lnTo>
+                  <a:lnTo>
+                    <a:pt x="3266126" y="2770388"/>
+                  </a:lnTo>
+                  <a:lnTo>
+                    <a:pt x="3337748" y="2778428"/>
+                  </a:lnTo>
+                  <a:lnTo>
+                    <a:pt x="3409371" y="2786377"/>
+                  </a:lnTo>
+                  <a:lnTo>
+                    <a:pt x="3480993" y="2794237"/>
+                  </a:lnTo>
+                  <a:lnTo>
+                    <a:pt x="3552616" y="2802008"/>
+                  </a:lnTo>
+                  <a:lnTo>
+                    <a:pt x="3624238" y="2809692"/>
+                  </a:lnTo>
+                  <a:lnTo>
+                    <a:pt x="3695861" y="2817288"/>
+                  </a:lnTo>
+                  <a:lnTo>
+                    <a:pt x="3767483" y="2824800"/>
+                  </a:lnTo>
+                  <a:lnTo>
+                    <a:pt x="3839106" y="2832226"/>
+                  </a:lnTo>
+                  <a:lnTo>
+                    <a:pt x="3910728" y="2839569"/>
+                  </a:lnTo>
+                  <a:lnTo>
+                    <a:pt x="3982351" y="2846830"/>
+                  </a:lnTo>
+                  <a:lnTo>
+                    <a:pt x="4053973" y="2854008"/>
+                  </a:lnTo>
+                  <a:lnTo>
+                    <a:pt x="4125596" y="2861105"/>
+                  </a:lnTo>
+                  <a:lnTo>
+                    <a:pt x="4197218" y="2868123"/>
+                  </a:lnTo>
+                  <a:lnTo>
+                    <a:pt x="4268841" y="2875061"/>
+                  </a:lnTo>
+                  <a:lnTo>
+                    <a:pt x="4340463" y="2881922"/>
+                  </a:lnTo>
+                  <a:lnTo>
+                    <a:pt x="4412086" y="2888704"/>
+                  </a:lnTo>
+                  <a:lnTo>
+                    <a:pt x="4483709" y="2895411"/>
+                  </a:lnTo>
+                  <a:lnTo>
+                    <a:pt x="4555331" y="2902042"/>
+                  </a:lnTo>
+                  <a:lnTo>
+                    <a:pt x="4626954" y="2908598"/>
+                  </a:lnTo>
+                  <a:lnTo>
+                    <a:pt x="4698576" y="2915080"/>
+                  </a:lnTo>
+                  <a:lnTo>
+                    <a:pt x="4770199" y="2921489"/>
+                  </a:lnTo>
+                  <a:lnTo>
+                    <a:pt x="4841821" y="2927826"/>
+                  </a:lnTo>
+                  <a:lnTo>
+                    <a:pt x="4913444" y="2934092"/>
+                  </a:lnTo>
+                  <a:lnTo>
+                    <a:pt x="4985066" y="2940286"/>
+                  </a:lnTo>
+                  <a:lnTo>
+                    <a:pt x="5056689" y="2946412"/>
+                  </a:lnTo>
+                  <a:lnTo>
+                    <a:pt x="5128311" y="2952468"/>
+                  </a:lnTo>
+                  <a:lnTo>
+                    <a:pt x="5199934" y="2958455"/>
+                  </a:lnTo>
+                  <a:lnTo>
+                    <a:pt x="5271556" y="2964376"/>
+                  </a:lnTo>
+                  <a:lnTo>
+                    <a:pt x="5343179" y="2970229"/>
+                  </a:lnTo>
+                  <a:lnTo>
+                    <a:pt x="5414801" y="2976017"/>
+                  </a:lnTo>
+                  <a:lnTo>
+                    <a:pt x="5486424" y="2981739"/>
+                  </a:lnTo>
+                  <a:lnTo>
+                    <a:pt x="5558046" y="2987397"/>
+                  </a:lnTo>
+                  <a:lnTo>
+                    <a:pt x="5629669" y="2992991"/>
+                  </a:lnTo>
+                  <a:lnTo>
+                    <a:pt x="5701291" y="2998522"/>
+                  </a:lnTo>
+                  <a:lnTo>
+                    <a:pt x="5772914" y="3003991"/>
+                  </a:lnTo>
+                  <a:lnTo>
+                    <a:pt x="5844537" y="3009398"/>
+                  </a:lnTo>
+                  <a:lnTo>
+                    <a:pt x="5916159" y="3014744"/>
+                  </a:lnTo>
+                  <a:lnTo>
+                    <a:pt x="5987782" y="3020030"/>
                   </a:lnTo>
                 </a:path>
               </a:pathLst>
@@ -3831,309 +3825,309 @@
           </p:nvSpPr>
           <p:spPr>
             <a:xfrm>
-              <a:off x="1172049" y="4188743"/>
-              <a:ext cx="7090630" cy="1280777"/>
+              <a:off x="1172049" y="4133016"/>
+              <a:ext cx="7090630" cy="1339324"/>
             </a:xfrm>
             <a:custGeom>
               <a:avLst/>
               <a:pathLst>
-                <a:path w="7090630" h="1280777">
+                <a:path w="7090630" h="1339324">
                   <a:moveTo>
-                    <a:pt x="7090630" y="1280777"/>
+                    <a:pt x="7090630" y="1339324"/>
                   </a:moveTo>
                   <a:lnTo>
-                    <a:pt x="7019007" y="1276850"/>
-                  </a:lnTo>
-                  <a:lnTo>
-                    <a:pt x="6947385" y="1272748"/>
-                  </a:lnTo>
-                  <a:lnTo>
-                    <a:pt x="6875762" y="1268462"/>
-                  </a:lnTo>
-                  <a:lnTo>
-                    <a:pt x="6804139" y="1263983"/>
-                  </a:lnTo>
-                  <a:lnTo>
-                    <a:pt x="6732517" y="1259305"/>
-                  </a:lnTo>
-                  <a:lnTo>
-                    <a:pt x="6660894" y="1254417"/>
-                  </a:lnTo>
-                  <a:lnTo>
-                    <a:pt x="6589272" y="1249310"/>
-                  </a:lnTo>
-                  <a:lnTo>
-                    <a:pt x="6517649" y="1243975"/>
-                  </a:lnTo>
-                  <a:lnTo>
-                    <a:pt x="6446027" y="1238401"/>
-                  </a:lnTo>
-                  <a:lnTo>
-                    <a:pt x="6374404" y="1232577"/>
-                  </a:lnTo>
-                  <a:lnTo>
-                    <a:pt x="6302782" y="1226493"/>
-                  </a:lnTo>
-                  <a:lnTo>
-                    <a:pt x="6231159" y="1220136"/>
-                  </a:lnTo>
-                  <a:lnTo>
-                    <a:pt x="6159537" y="1213495"/>
-                  </a:lnTo>
-                  <a:lnTo>
-                    <a:pt x="6087914" y="1206556"/>
-                  </a:lnTo>
-                  <a:lnTo>
-                    <a:pt x="6016292" y="1199307"/>
-                  </a:lnTo>
-                  <a:lnTo>
-                    <a:pt x="5944669" y="1191733"/>
-                  </a:lnTo>
-                  <a:lnTo>
-                    <a:pt x="5873047" y="1183821"/>
-                  </a:lnTo>
-                  <a:lnTo>
-                    <a:pt x="5801424" y="1175554"/>
-                  </a:lnTo>
-                  <a:lnTo>
-                    <a:pt x="5729802" y="1166917"/>
-                  </a:lnTo>
-                  <a:lnTo>
-                    <a:pt x="5658179" y="1157894"/>
-                  </a:lnTo>
-                  <a:lnTo>
-                    <a:pt x="5586557" y="1148466"/>
-                  </a:lnTo>
-                  <a:lnTo>
-                    <a:pt x="5514934" y="1138617"/>
-                  </a:lnTo>
-                  <a:lnTo>
-                    <a:pt x="5443311" y="1128327"/>
-                  </a:lnTo>
-                  <a:lnTo>
-                    <a:pt x="5371689" y="1117576"/>
-                  </a:lnTo>
-                  <a:lnTo>
-                    <a:pt x="5300066" y="1106344"/>
-                  </a:lnTo>
-                  <a:lnTo>
-                    <a:pt x="5228444" y="1094610"/>
-                  </a:lnTo>
-                  <a:lnTo>
-                    <a:pt x="5156821" y="1082350"/>
-                  </a:lnTo>
-                  <a:lnTo>
-                    <a:pt x="5085199" y="1069541"/>
-                  </a:lnTo>
-                  <a:lnTo>
-                    <a:pt x="5013576" y="1056159"/>
-                  </a:lnTo>
-                  <a:lnTo>
-                    <a:pt x="4941954" y="1042178"/>
-                  </a:lnTo>
-                  <a:lnTo>
-                    <a:pt x="4870331" y="1027571"/>
-                  </a:lnTo>
-                  <a:lnTo>
-                    <a:pt x="4798709" y="1012310"/>
-                  </a:lnTo>
-                  <a:lnTo>
-                    <a:pt x="4727086" y="996366"/>
-                  </a:lnTo>
-                  <a:lnTo>
-                    <a:pt x="4655464" y="979709"/>
-                  </a:lnTo>
-                  <a:lnTo>
-                    <a:pt x="4583841" y="962305"/>
-                  </a:lnTo>
-                  <a:lnTo>
-                    <a:pt x="4512219" y="944123"/>
-                  </a:lnTo>
-                  <a:lnTo>
-                    <a:pt x="4440596" y="925127"/>
-                  </a:lnTo>
-                  <a:lnTo>
-                    <a:pt x="4368974" y="905281"/>
-                  </a:lnTo>
-                  <a:lnTo>
-                    <a:pt x="4297351" y="884546"/>
-                  </a:lnTo>
-                  <a:lnTo>
-                    <a:pt x="4225729" y="862884"/>
-                  </a:lnTo>
-                  <a:lnTo>
-                    <a:pt x="4154106" y="840251"/>
-                  </a:lnTo>
-                  <a:lnTo>
-                    <a:pt x="4082483" y="816606"/>
-                  </a:lnTo>
-                  <a:lnTo>
-                    <a:pt x="4010861" y="791902"/>
-                  </a:lnTo>
-                  <a:lnTo>
-                    <a:pt x="3939238" y="766092"/>
-                  </a:lnTo>
-                  <a:lnTo>
-                    <a:pt x="3867616" y="739128"/>
-                  </a:lnTo>
-                  <a:lnTo>
-                    <a:pt x="3795993" y="710956"/>
-                  </a:lnTo>
-                  <a:lnTo>
-                    <a:pt x="3724371" y="681523"/>
-                  </a:lnTo>
-                  <a:lnTo>
-                    <a:pt x="3652748" y="650772"/>
-                  </a:lnTo>
-                  <a:lnTo>
-                    <a:pt x="3581126" y="618646"/>
-                  </a:lnTo>
-                  <a:lnTo>
-                    <a:pt x="3509503" y="585081"/>
-                  </a:lnTo>
-                  <a:lnTo>
-                    <a:pt x="3437881" y="550013"/>
-                  </a:lnTo>
-                  <a:lnTo>
-                    <a:pt x="3366258" y="532960"/>
-                  </a:lnTo>
-                  <a:lnTo>
-                    <a:pt x="3294636" y="524143"/>
-                  </a:lnTo>
-                  <a:lnTo>
-                    <a:pt x="3223013" y="515232"/>
-                  </a:lnTo>
-                  <a:lnTo>
-                    <a:pt x="3151391" y="506228"/>
-                  </a:lnTo>
-                  <a:lnTo>
-                    <a:pt x="3079768" y="497128"/>
-                  </a:lnTo>
-                  <a:lnTo>
-                    <a:pt x="3008146" y="487933"/>
-                  </a:lnTo>
-                  <a:lnTo>
-                    <a:pt x="2936523" y="478640"/>
-                  </a:lnTo>
-                  <a:lnTo>
-                    <a:pt x="2864901" y="469249"/>
-                  </a:lnTo>
-                  <a:lnTo>
-                    <a:pt x="2793278" y="459759"/>
-                  </a:lnTo>
-                  <a:lnTo>
-                    <a:pt x="2721655" y="450169"/>
-                  </a:lnTo>
-                  <a:lnTo>
-                    <a:pt x="2650033" y="440478"/>
-                  </a:lnTo>
-                  <a:lnTo>
-                    <a:pt x="2578410" y="430685"/>
-                  </a:lnTo>
-                  <a:lnTo>
-                    <a:pt x="2506788" y="420788"/>
-                  </a:lnTo>
-                  <a:lnTo>
-                    <a:pt x="2435165" y="410787"/>
-                  </a:lnTo>
-                  <a:lnTo>
-                    <a:pt x="2363543" y="400680"/>
-                  </a:lnTo>
-                  <a:lnTo>
-                    <a:pt x="2291920" y="390467"/>
-                  </a:lnTo>
-                  <a:lnTo>
-                    <a:pt x="2220298" y="380145"/>
-                  </a:lnTo>
-                  <a:lnTo>
-                    <a:pt x="2148675" y="369715"/>
-                  </a:lnTo>
-                  <a:lnTo>
-                    <a:pt x="2077053" y="359175"/>
-                  </a:lnTo>
-                  <a:lnTo>
-                    <a:pt x="2005430" y="348524"/>
-                  </a:lnTo>
-                  <a:lnTo>
-                    <a:pt x="1933808" y="337760"/>
-                  </a:lnTo>
-                  <a:lnTo>
-                    <a:pt x="1862185" y="326882"/>
-                  </a:lnTo>
-                  <a:lnTo>
-                    <a:pt x="1790563" y="315890"/>
-                  </a:lnTo>
-                  <a:lnTo>
-                    <a:pt x="1718940" y="304782"/>
-                  </a:lnTo>
-                  <a:lnTo>
-                    <a:pt x="1647318" y="293556"/>
-                  </a:lnTo>
-                  <a:lnTo>
-                    <a:pt x="1575695" y="282213"/>
-                  </a:lnTo>
-                  <a:lnTo>
-                    <a:pt x="1504073" y="270749"/>
-                  </a:lnTo>
-                  <a:lnTo>
-                    <a:pt x="1432450" y="259164"/>
-                  </a:lnTo>
-                  <a:lnTo>
-                    <a:pt x="1360827" y="247458"/>
-                  </a:lnTo>
-                  <a:lnTo>
-                    <a:pt x="1289205" y="235627"/>
-                  </a:lnTo>
-                  <a:lnTo>
-                    <a:pt x="1217582" y="223672"/>
-                  </a:lnTo>
-                  <a:lnTo>
-                    <a:pt x="1145960" y="211591"/>
-                  </a:lnTo>
-                  <a:lnTo>
-                    <a:pt x="1074337" y="199382"/>
-                  </a:lnTo>
-                  <a:lnTo>
-                    <a:pt x="1002715" y="187044"/>
-                  </a:lnTo>
-                  <a:lnTo>
-                    <a:pt x="931092" y="174576"/>
-                  </a:lnTo>
-                  <a:lnTo>
-                    <a:pt x="859470" y="161977"/>
-                  </a:lnTo>
-                  <a:lnTo>
-                    <a:pt x="787847" y="149244"/>
-                  </a:lnTo>
-                  <a:lnTo>
-                    <a:pt x="716225" y="136377"/>
-                  </a:lnTo>
-                  <a:lnTo>
-                    <a:pt x="644602" y="123375"/>
-                  </a:lnTo>
-                  <a:lnTo>
-                    <a:pt x="572980" y="110235"/>
-                  </a:lnTo>
-                  <a:lnTo>
-                    <a:pt x="501357" y="96956"/>
-                  </a:lnTo>
-                  <a:lnTo>
-                    <a:pt x="429735" y="83538"/>
-                  </a:lnTo>
-                  <a:lnTo>
-                    <a:pt x="358112" y="69978"/>
-                  </a:lnTo>
-                  <a:lnTo>
-                    <a:pt x="286490" y="56274"/>
-                  </a:lnTo>
-                  <a:lnTo>
-                    <a:pt x="214867" y="42426"/>
-                  </a:lnTo>
-                  <a:lnTo>
-                    <a:pt x="143245" y="28432"/>
-                  </a:lnTo>
-                  <a:lnTo>
-                    <a:pt x="71622" y="14290"/>
+                    <a:pt x="7019007" y="1335467"/>
+                  </a:lnTo>
+                  <a:lnTo>
+                    <a:pt x="6947385" y="1331435"/>
+                  </a:lnTo>
+                  <a:lnTo>
+                    <a:pt x="6875762" y="1327219"/>
+                  </a:lnTo>
+                  <a:lnTo>
+                    <a:pt x="6804139" y="1322812"/>
+                  </a:lnTo>
+                  <a:lnTo>
+                    <a:pt x="6732517" y="1318205"/>
+                  </a:lnTo>
+                  <a:lnTo>
+                    <a:pt x="6660894" y="1313389"/>
+                  </a:lnTo>
+                  <a:lnTo>
+                    <a:pt x="6589272" y="1308353"/>
+                  </a:lnTo>
+                  <a:lnTo>
+                    <a:pt x="6517649" y="1303089"/>
+                  </a:lnTo>
+                  <a:lnTo>
+                    <a:pt x="6446027" y="1297586"/>
+                  </a:lnTo>
+                  <a:lnTo>
+                    <a:pt x="6374404" y="1291833"/>
+                  </a:lnTo>
+                  <a:lnTo>
+                    <a:pt x="6302782" y="1285818"/>
+                  </a:lnTo>
+                  <a:lnTo>
+                    <a:pt x="6231159" y="1279531"/>
+                  </a:lnTo>
+                  <a:lnTo>
+                    <a:pt x="6159537" y="1272957"/>
+                  </a:lnTo>
+                  <a:lnTo>
+                    <a:pt x="6087914" y="1266085"/>
+                  </a:lnTo>
+                  <a:lnTo>
+                    <a:pt x="6016292" y="1258901"/>
+                  </a:lnTo>
+                  <a:lnTo>
+                    <a:pt x="5944669" y="1251391"/>
+                  </a:lnTo>
+                  <a:lnTo>
+                    <a:pt x="5873047" y="1243539"/>
+                  </a:lnTo>
+                  <a:lnTo>
+                    <a:pt x="5801424" y="1235331"/>
+                  </a:lnTo>
+                  <a:lnTo>
+                    <a:pt x="5729802" y="1226749"/>
+                  </a:lnTo>
+                  <a:lnTo>
+                    <a:pt x="5658179" y="1217778"/>
+                  </a:lnTo>
+                  <a:lnTo>
+                    <a:pt x="5586557" y="1208400"/>
+                  </a:lnTo>
+                  <a:lnTo>
+                    <a:pt x="5514934" y="1198595"/>
+                  </a:lnTo>
+                  <a:lnTo>
+                    <a:pt x="5443311" y="1188345"/>
+                  </a:lnTo>
+                  <a:lnTo>
+                    <a:pt x="5371689" y="1177629"/>
+                  </a:lnTo>
+                  <a:lnTo>
+                    <a:pt x="5300066" y="1166427"/>
+                  </a:lnTo>
+                  <a:lnTo>
+                    <a:pt x="5228444" y="1154715"/>
+                  </a:lnTo>
+                  <a:lnTo>
+                    <a:pt x="5156821" y="1142472"/>
+                  </a:lnTo>
+                  <a:lnTo>
+                    <a:pt x="5085199" y="1129672"/>
+                  </a:lnTo>
+                  <a:lnTo>
+                    <a:pt x="5013576" y="1116291"/>
+                  </a:lnTo>
+                  <a:lnTo>
+                    <a:pt x="4941954" y="1102302"/>
+                  </a:lnTo>
+                  <a:lnTo>
+                    <a:pt x="4870331" y="1087678"/>
+                  </a:lnTo>
+                  <a:lnTo>
+                    <a:pt x="4798709" y="1072389"/>
+                  </a:lnTo>
+                  <a:lnTo>
+                    <a:pt x="4727086" y="1056406"/>
+                  </a:lnTo>
+                  <a:lnTo>
+                    <a:pt x="4655464" y="1039697"/>
+                  </a:lnTo>
+                  <a:lnTo>
+                    <a:pt x="4583841" y="1022228"/>
+                  </a:lnTo>
+                  <a:lnTo>
+                    <a:pt x="4512219" y="1003967"/>
+                  </a:lnTo>
+                  <a:lnTo>
+                    <a:pt x="4440596" y="984875"/>
+                  </a:lnTo>
+                  <a:lnTo>
+                    <a:pt x="4368974" y="964916"/>
+                  </a:lnTo>
+                  <a:lnTo>
+                    <a:pt x="4297351" y="944051"/>
+                  </a:lnTo>
+                  <a:lnTo>
+                    <a:pt x="4225729" y="922238"/>
+                  </a:lnTo>
+                  <a:lnTo>
+                    <a:pt x="4154106" y="899434"/>
+                  </a:lnTo>
+                  <a:lnTo>
+                    <a:pt x="4082483" y="875594"/>
+                  </a:lnTo>
+                  <a:lnTo>
+                    <a:pt x="4010861" y="850670"/>
+                  </a:lnTo>
+                  <a:lnTo>
+                    <a:pt x="3939238" y="824615"/>
+                  </a:lnTo>
+                  <a:lnTo>
+                    <a:pt x="3867616" y="797376"/>
+                  </a:lnTo>
+                  <a:lnTo>
+                    <a:pt x="3795993" y="768900"/>
+                  </a:lnTo>
+                  <a:lnTo>
+                    <a:pt x="3724371" y="739130"/>
+                  </a:lnTo>
+                  <a:lnTo>
+                    <a:pt x="3652748" y="708008"/>
+                  </a:lnTo>
+                  <a:lnTo>
+                    <a:pt x="3581126" y="675472"/>
+                  </a:lnTo>
+                  <a:lnTo>
+                    <a:pt x="3509503" y="641458"/>
+                  </a:lnTo>
+                  <a:lnTo>
+                    <a:pt x="3437881" y="605899"/>
+                  </a:lnTo>
+                  <a:lnTo>
+                    <a:pt x="3366258" y="588200"/>
+                  </a:lnTo>
+                  <a:lnTo>
+                    <a:pt x="3294636" y="578670"/>
+                  </a:lnTo>
+                  <a:lnTo>
+                    <a:pt x="3223013" y="569032"/>
+                  </a:lnTo>
+                  <a:lnTo>
+                    <a:pt x="3151391" y="559283"/>
+                  </a:lnTo>
+                  <a:lnTo>
+                    <a:pt x="3079768" y="549424"/>
+                  </a:lnTo>
+                  <a:lnTo>
+                    <a:pt x="3008146" y="539452"/>
+                  </a:lnTo>
+                  <a:lnTo>
+                    <a:pt x="2936523" y="529366"/>
+                  </a:lnTo>
+                  <a:lnTo>
+                    <a:pt x="2864901" y="519166"/>
+                  </a:lnTo>
+                  <a:lnTo>
+                    <a:pt x="2793278" y="508849"/>
+                  </a:lnTo>
+                  <a:lnTo>
+                    <a:pt x="2721655" y="498415"/>
+                  </a:lnTo>
+                  <a:lnTo>
+                    <a:pt x="2650033" y="487861"/>
+                  </a:lnTo>
+                  <a:lnTo>
+                    <a:pt x="2578410" y="477188"/>
+                  </a:lnTo>
+                  <a:lnTo>
+                    <a:pt x="2506788" y="466392"/>
+                  </a:lnTo>
+                  <a:lnTo>
+                    <a:pt x="2435165" y="455474"/>
+                  </a:lnTo>
+                  <a:lnTo>
+                    <a:pt x="2363543" y="444431"/>
+                  </a:lnTo>
+                  <a:lnTo>
+                    <a:pt x="2291920" y="433262"/>
+                  </a:lnTo>
+                  <a:lnTo>
+                    <a:pt x="2220298" y="421966"/>
+                  </a:lnTo>
+                  <a:lnTo>
+                    <a:pt x="2148675" y="410541"/>
+                  </a:lnTo>
+                  <a:lnTo>
+                    <a:pt x="2077053" y="398986"/>
+                  </a:lnTo>
+                  <a:lnTo>
+                    <a:pt x="2005430" y="387299"/>
+                  </a:lnTo>
+                  <a:lnTo>
+                    <a:pt x="1933808" y="375480"/>
+                  </a:lnTo>
+                  <a:lnTo>
+                    <a:pt x="1862185" y="363525"/>
+                  </a:lnTo>
+                  <a:lnTo>
+                    <a:pt x="1790563" y="351434"/>
+                  </a:lnTo>
+                  <a:lnTo>
+                    <a:pt x="1718940" y="339205"/>
+                  </a:lnTo>
+                  <a:lnTo>
+                    <a:pt x="1647318" y="326837"/>
+                  </a:lnTo>
+                  <a:lnTo>
+                    <a:pt x="1575695" y="314328"/>
+                  </a:lnTo>
+                  <a:lnTo>
+                    <a:pt x="1504073" y="301676"/>
+                  </a:lnTo>
+                  <a:lnTo>
+                    <a:pt x="1432450" y="288880"/>
+                  </a:lnTo>
+                  <a:lnTo>
+                    <a:pt x="1360827" y="275938"/>
+                  </a:lnTo>
+                  <a:lnTo>
+                    <a:pt x="1289205" y="262849"/>
+                  </a:lnTo>
+                  <a:lnTo>
+                    <a:pt x="1217582" y="249610"/>
+                  </a:lnTo>
+                  <a:lnTo>
+                    <a:pt x="1145960" y="236220"/>
+                  </a:lnTo>
+                  <a:lnTo>
+                    <a:pt x="1074337" y="222678"/>
+                  </a:lnTo>
+                  <a:lnTo>
+                    <a:pt x="1002715" y="208982"/>
+                  </a:lnTo>
+                  <a:lnTo>
+                    <a:pt x="931092" y="195129"/>
+                  </a:lnTo>
+                  <a:lnTo>
+                    <a:pt x="859470" y="181119"/>
+                  </a:lnTo>
+                  <a:lnTo>
+                    <a:pt x="787847" y="166948"/>
+                  </a:lnTo>
+                  <a:lnTo>
+                    <a:pt x="716225" y="152617"/>
+                  </a:lnTo>
+                  <a:lnTo>
+                    <a:pt x="644602" y="138122"/>
+                  </a:lnTo>
+                  <a:lnTo>
+                    <a:pt x="572980" y="123461"/>
+                  </a:lnTo>
+                  <a:lnTo>
+                    <a:pt x="501357" y="108634"/>
+                  </a:lnTo>
+                  <a:lnTo>
+                    <a:pt x="429735" y="93637"/>
+                  </a:lnTo>
+                  <a:lnTo>
+                    <a:pt x="358112" y="78470"/>
+                  </a:lnTo>
+                  <a:lnTo>
+                    <a:pt x="286490" y="63129"/>
+                  </a:lnTo>
+                  <a:lnTo>
+                    <a:pt x="214867" y="47614"/>
+                  </a:lnTo>
+                  <a:lnTo>
+                    <a:pt x="143245" y="31922"/>
+                  </a:lnTo>
+                  <a:lnTo>
+                    <a:pt x="71622" y="16051"/>
                   </a:lnTo>
                   <a:lnTo>
                     <a:pt x="0" y="0"/>
@@ -4156,312 +4150,312 @@
           </p:nvSpPr>
           <p:spPr>
             <a:xfrm>
-              <a:off x="1172049" y="2530042"/>
-              <a:ext cx="7090630" cy="2821135"/>
+              <a:off x="1172049" y="2421756"/>
+              <a:ext cx="7090630" cy="2937066"/>
             </a:xfrm>
             <a:custGeom>
               <a:avLst/>
               <a:pathLst>
-                <a:path w="7090630" h="2821135">
+                <a:path w="7090630" h="2937066">
                   <a:moveTo>
                     <a:pt x="0" y="0"/>
                   </a:moveTo>
                   <a:lnTo>
-                    <a:pt x="71622" y="81062"/>
-                  </a:lnTo>
-                  <a:lnTo>
-                    <a:pt x="143245" y="159954"/>
-                  </a:lnTo>
-                  <a:lnTo>
-                    <a:pt x="214867" y="236734"/>
-                  </a:lnTo>
-                  <a:lnTo>
-                    <a:pt x="286490" y="311457"/>
-                  </a:lnTo>
-                  <a:lnTo>
-                    <a:pt x="358112" y="384180"/>
-                  </a:lnTo>
-                  <a:lnTo>
-                    <a:pt x="429735" y="454955"/>
-                  </a:lnTo>
-                  <a:lnTo>
-                    <a:pt x="501357" y="523835"/>
-                  </a:lnTo>
-                  <a:lnTo>
-                    <a:pt x="572980" y="590871"/>
-                  </a:lnTo>
-                  <a:lnTo>
-                    <a:pt x="644602" y="656111"/>
-                  </a:lnTo>
-                  <a:lnTo>
-                    <a:pt x="716225" y="719604"/>
-                  </a:lnTo>
-                  <a:lnTo>
-                    <a:pt x="787847" y="781398"/>
-                  </a:lnTo>
-                  <a:lnTo>
-                    <a:pt x="859470" y="841536"/>
-                  </a:lnTo>
-                  <a:lnTo>
-                    <a:pt x="931092" y="900064"/>
-                  </a:lnTo>
-                  <a:lnTo>
-                    <a:pt x="1002715" y="957025"/>
-                  </a:lnTo>
-                  <a:lnTo>
-                    <a:pt x="1074337" y="1012460"/>
-                  </a:lnTo>
-                  <a:lnTo>
-                    <a:pt x="1145960" y="1066411"/>
-                  </a:lnTo>
-                  <a:lnTo>
-                    <a:pt x="1217582" y="1118918"/>
-                  </a:lnTo>
-                  <a:lnTo>
-                    <a:pt x="1289205" y="1170018"/>
-                  </a:lnTo>
-                  <a:lnTo>
-                    <a:pt x="1360827" y="1219750"/>
-                  </a:lnTo>
-                  <a:lnTo>
-                    <a:pt x="1432450" y="1268150"/>
-                  </a:lnTo>
-                  <a:lnTo>
-                    <a:pt x="1504073" y="1315254"/>
-                  </a:lnTo>
-                  <a:lnTo>
-                    <a:pt x="1575695" y="1361097"/>
-                  </a:lnTo>
-                  <a:lnTo>
-                    <a:pt x="1647318" y="1405712"/>
-                  </a:lnTo>
-                  <a:lnTo>
-                    <a:pt x="1718940" y="1449133"/>
-                  </a:lnTo>
-                  <a:lnTo>
-                    <a:pt x="1790563" y="1491391"/>
-                  </a:lnTo>
-                  <a:lnTo>
-                    <a:pt x="1862185" y="1532517"/>
-                  </a:lnTo>
-                  <a:lnTo>
-                    <a:pt x="1933808" y="1572542"/>
-                  </a:lnTo>
-                  <a:lnTo>
-                    <a:pt x="2005430" y="1611495"/>
-                  </a:lnTo>
-                  <a:lnTo>
-                    <a:pt x="2077053" y="1649405"/>
-                  </a:lnTo>
-                  <a:lnTo>
-                    <a:pt x="2148675" y="1686300"/>
-                  </a:lnTo>
-                  <a:lnTo>
-                    <a:pt x="2220298" y="1722207"/>
-                  </a:lnTo>
-                  <a:lnTo>
-                    <a:pt x="2291920" y="1757152"/>
-                  </a:lnTo>
-                  <a:lnTo>
-                    <a:pt x="2363543" y="1791162"/>
-                  </a:lnTo>
-                  <a:lnTo>
-                    <a:pt x="2435165" y="1824261"/>
-                  </a:lnTo>
-                  <a:lnTo>
-                    <a:pt x="2506788" y="1856473"/>
-                  </a:lnTo>
-                  <a:lnTo>
-                    <a:pt x="2578410" y="1887823"/>
-                  </a:lnTo>
-                  <a:lnTo>
-                    <a:pt x="2650033" y="1918334"/>
-                  </a:lnTo>
-                  <a:lnTo>
-                    <a:pt x="2721655" y="1948027"/>
-                  </a:lnTo>
-                  <a:lnTo>
-                    <a:pt x="2793278" y="1976926"/>
-                  </a:lnTo>
-                  <a:lnTo>
-                    <a:pt x="2864901" y="2005050"/>
-                  </a:lnTo>
-                  <a:lnTo>
-                    <a:pt x="2936523" y="2032422"/>
-                  </a:lnTo>
-                  <a:lnTo>
-                    <a:pt x="3008146" y="2059060"/>
-                  </a:lnTo>
-                  <a:lnTo>
-                    <a:pt x="3079768" y="2084985"/>
-                  </a:lnTo>
-                  <a:lnTo>
-                    <a:pt x="3151391" y="2110216"/>
-                  </a:lnTo>
-                  <a:lnTo>
-                    <a:pt x="3223013" y="2134771"/>
-                  </a:lnTo>
-                  <a:lnTo>
-                    <a:pt x="3294636" y="2158669"/>
-                  </a:lnTo>
-                  <a:lnTo>
-                    <a:pt x="3366258" y="2181927"/>
-                  </a:lnTo>
-                  <a:lnTo>
-                    <a:pt x="3437881" y="2204562"/>
-                  </a:lnTo>
-                  <a:lnTo>
-                    <a:pt x="3509503" y="2226591"/>
-                  </a:lnTo>
-                  <a:lnTo>
-                    <a:pt x="3581126" y="2248030"/>
-                  </a:lnTo>
-                  <a:lnTo>
-                    <a:pt x="3652748" y="2268895"/>
-                  </a:lnTo>
-                  <a:lnTo>
-                    <a:pt x="3724371" y="2289201"/>
-                  </a:lnTo>
-                  <a:lnTo>
-                    <a:pt x="3795993" y="2308963"/>
-                  </a:lnTo>
-                  <a:lnTo>
-                    <a:pt x="3867616" y="2328196"/>
-                  </a:lnTo>
-                  <a:lnTo>
-                    <a:pt x="3939238" y="2346914"/>
-                  </a:lnTo>
-                  <a:lnTo>
-                    <a:pt x="4010861" y="2365131"/>
-                  </a:lnTo>
-                  <a:lnTo>
-                    <a:pt x="4082483" y="2382861"/>
-                  </a:lnTo>
-                  <a:lnTo>
-                    <a:pt x="4154106" y="2400115"/>
-                  </a:lnTo>
-                  <a:lnTo>
-                    <a:pt x="4225729" y="2416907"/>
-                  </a:lnTo>
-                  <a:lnTo>
-                    <a:pt x="4297351" y="2433250"/>
-                  </a:lnTo>
-                  <a:lnTo>
-                    <a:pt x="4368974" y="2449155"/>
-                  </a:lnTo>
-                  <a:lnTo>
-                    <a:pt x="4440596" y="2464634"/>
-                  </a:lnTo>
-                  <a:lnTo>
-                    <a:pt x="4512219" y="2479699"/>
-                  </a:lnTo>
-                  <a:lnTo>
-                    <a:pt x="4583841" y="2494360"/>
-                  </a:lnTo>
-                  <a:lnTo>
-                    <a:pt x="4655464" y="2508629"/>
-                  </a:lnTo>
-                  <a:lnTo>
-                    <a:pt x="4727086" y="2522515"/>
-                  </a:lnTo>
-                  <a:lnTo>
-                    <a:pt x="4798709" y="2536030"/>
-                  </a:lnTo>
-                  <a:lnTo>
-                    <a:pt x="4870331" y="2549183"/>
-                  </a:lnTo>
-                  <a:lnTo>
-                    <a:pt x="4941954" y="2561983"/>
-                  </a:lnTo>
-                  <a:lnTo>
-                    <a:pt x="5013576" y="2574441"/>
-                  </a:lnTo>
-                  <a:lnTo>
-                    <a:pt x="5085199" y="2586565"/>
-                  </a:lnTo>
-                  <a:lnTo>
-                    <a:pt x="5156821" y="2598365"/>
-                  </a:lnTo>
-                  <a:lnTo>
-                    <a:pt x="5228444" y="2609848"/>
-                  </a:lnTo>
-                  <a:lnTo>
-                    <a:pt x="5300066" y="2621024"/>
-                  </a:lnTo>
-                  <a:lnTo>
-                    <a:pt x="5371689" y="2631901"/>
-                  </a:lnTo>
-                  <a:lnTo>
-                    <a:pt x="5443311" y="2642487"/>
-                  </a:lnTo>
-                  <a:lnTo>
-                    <a:pt x="5514934" y="2652789"/>
-                  </a:lnTo>
-                  <a:lnTo>
-                    <a:pt x="5586557" y="2662815"/>
-                  </a:lnTo>
-                  <a:lnTo>
-                    <a:pt x="5658179" y="2672573"/>
-                  </a:lnTo>
-                  <a:lnTo>
-                    <a:pt x="5729802" y="2682069"/>
-                  </a:lnTo>
-                  <a:lnTo>
-                    <a:pt x="5801424" y="2691311"/>
-                  </a:lnTo>
-                  <a:lnTo>
-                    <a:pt x="5873047" y="2700306"/>
-                  </a:lnTo>
-                  <a:lnTo>
-                    <a:pt x="5944669" y="2709060"/>
-                  </a:lnTo>
-                  <a:lnTo>
-                    <a:pt x="6016292" y="2717579"/>
-                  </a:lnTo>
-                  <a:lnTo>
-                    <a:pt x="6087914" y="2725870"/>
-                  </a:lnTo>
-                  <a:lnTo>
-                    <a:pt x="6159537" y="2733940"/>
-                  </a:lnTo>
-                  <a:lnTo>
-                    <a:pt x="6231159" y="2741793"/>
-                  </a:lnTo>
-                  <a:lnTo>
-                    <a:pt x="6302782" y="2749436"/>
-                  </a:lnTo>
-                  <a:lnTo>
-                    <a:pt x="6374404" y="2756874"/>
-                  </a:lnTo>
-                  <a:lnTo>
-                    <a:pt x="6446027" y="2764113"/>
-                  </a:lnTo>
-                  <a:lnTo>
-                    <a:pt x="6517649" y="2771158"/>
-                  </a:lnTo>
-                  <a:lnTo>
-                    <a:pt x="6589272" y="2778014"/>
-                  </a:lnTo>
-                  <a:lnTo>
-                    <a:pt x="6660894" y="2784687"/>
-                  </a:lnTo>
-                  <a:lnTo>
-                    <a:pt x="6732517" y="2791182"/>
-                  </a:lnTo>
-                  <a:lnTo>
-                    <a:pt x="6804139" y="2797502"/>
-                  </a:lnTo>
-                  <a:lnTo>
-                    <a:pt x="6875762" y="2803653"/>
-                  </a:lnTo>
-                  <a:lnTo>
-                    <a:pt x="6947385" y="2809639"/>
-                  </a:lnTo>
-                  <a:lnTo>
-                    <a:pt x="7019007" y="2815465"/>
-                  </a:lnTo>
-                  <a:lnTo>
-                    <a:pt x="7090630" y="2821135"/>
+                    <a:pt x="71622" y="86210"/>
+                  </a:lnTo>
+                  <a:lnTo>
+                    <a:pt x="143245" y="170050"/>
+                  </a:lnTo>
+                  <a:lnTo>
+                    <a:pt x="214867" y="251584"/>
+                  </a:lnTo>
+                  <a:lnTo>
+                    <a:pt x="286490" y="330877"/>
+                  </a:lnTo>
+                  <a:lnTo>
+                    <a:pt x="358112" y="407990"/>
+                  </a:lnTo>
+                  <a:lnTo>
+                    <a:pt x="429735" y="482982"/>
+                  </a:lnTo>
+                  <a:lnTo>
+                    <a:pt x="501357" y="555913"/>
+                  </a:lnTo>
+                  <a:lnTo>
+                    <a:pt x="572980" y="626838"/>
+                  </a:lnTo>
+                  <a:lnTo>
+                    <a:pt x="644602" y="695814"/>
+                  </a:lnTo>
+                  <a:lnTo>
+                    <a:pt x="716225" y="762893"/>
+                  </a:lnTo>
+                  <a:lnTo>
+                    <a:pt x="787847" y="828127"/>
+                  </a:lnTo>
+                  <a:lnTo>
+                    <a:pt x="859470" y="891568"/>
+                  </a:lnTo>
+                  <a:lnTo>
+                    <a:pt x="931092" y="953265"/>
+                  </a:lnTo>
+                  <a:lnTo>
+                    <a:pt x="1002715" y="1013265"/>
+                  </a:lnTo>
+                  <a:lnTo>
+                    <a:pt x="1074337" y="1071615"/>
+                  </a:lnTo>
+                  <a:lnTo>
+                    <a:pt x="1145960" y="1128362"/>
+                  </a:lnTo>
+                  <a:lnTo>
+                    <a:pt x="1217582" y="1183547"/>
+                  </a:lnTo>
+                  <a:lnTo>
+                    <a:pt x="1289205" y="1237216"/>
+                  </a:lnTo>
+                  <a:lnTo>
+                    <a:pt x="1360827" y="1289409"/>
+                  </a:lnTo>
+                  <a:lnTo>
+                    <a:pt x="1432450" y="1340167"/>
+                  </a:lnTo>
+                  <a:lnTo>
+                    <a:pt x="1504073" y="1389529"/>
+                  </a:lnTo>
+                  <a:lnTo>
+                    <a:pt x="1575695" y="1437535"/>
+                  </a:lnTo>
+                  <a:lnTo>
+                    <a:pt x="1647318" y="1484220"/>
+                  </a:lnTo>
+                  <a:lnTo>
+                    <a:pt x="1718940" y="1529621"/>
+                  </a:lnTo>
+                  <a:lnTo>
+                    <a:pt x="1790563" y="1573775"/>
+                  </a:lnTo>
+                  <a:lnTo>
+                    <a:pt x="1862185" y="1616714"/>
+                  </a:lnTo>
+                  <a:lnTo>
+                    <a:pt x="1933808" y="1658473"/>
+                  </a:lnTo>
+                  <a:lnTo>
+                    <a:pt x="2005430" y="1699083"/>
+                  </a:lnTo>
+                  <a:lnTo>
+                    <a:pt x="2077053" y="1738577"/>
+                  </a:lnTo>
+                  <a:lnTo>
+                    <a:pt x="2148675" y="1776986"/>
+                  </a:lnTo>
+                  <a:lnTo>
+                    <a:pt x="2220298" y="1814338"/>
+                  </a:lnTo>
+                  <a:lnTo>
+                    <a:pt x="2291920" y="1850663"/>
+                  </a:lnTo>
+                  <a:lnTo>
+                    <a:pt x="2363543" y="1885989"/>
+                  </a:lnTo>
+                  <a:lnTo>
+                    <a:pt x="2435165" y="1920344"/>
+                  </a:lnTo>
+                  <a:lnTo>
+                    <a:pt x="2506788" y="1953755"/>
+                  </a:lnTo>
+                  <a:lnTo>
+                    <a:pt x="2578410" y="1986246"/>
+                  </a:lnTo>
+                  <a:lnTo>
+                    <a:pt x="2650033" y="2017845"/>
+                  </a:lnTo>
+                  <a:lnTo>
+                    <a:pt x="2721655" y="2048574"/>
+                  </a:lnTo>
+                  <a:lnTo>
+                    <a:pt x="2793278" y="2078459"/>
+                  </a:lnTo>
+                  <a:lnTo>
+                    <a:pt x="2864901" y="2107522"/>
+                  </a:lnTo>
+                  <a:lnTo>
+                    <a:pt x="2936523" y="2135786"/>
+                  </a:lnTo>
+                  <a:lnTo>
+                    <a:pt x="3008146" y="2163273"/>
+                  </a:lnTo>
+                  <a:lnTo>
+                    <a:pt x="3079768" y="2190004"/>
+                  </a:lnTo>
+                  <a:lnTo>
+                    <a:pt x="3151391" y="2216000"/>
+                  </a:lnTo>
+                  <a:lnTo>
+                    <a:pt x="3223013" y="2241282"/>
+                  </a:lnTo>
+                  <a:lnTo>
+                    <a:pt x="3294636" y="2265868"/>
+                  </a:lnTo>
+                  <a:lnTo>
+                    <a:pt x="3366258" y="2289778"/>
+                  </a:lnTo>
+                  <a:lnTo>
+                    <a:pt x="3437881" y="2313031"/>
+                  </a:lnTo>
+                  <a:lnTo>
+                    <a:pt x="3509503" y="2335645"/>
+                  </a:lnTo>
+                  <a:lnTo>
+                    <a:pt x="3581126" y="2357636"/>
+                  </a:lnTo>
+                  <a:lnTo>
+                    <a:pt x="3652748" y="2379024"/>
+                  </a:lnTo>
+                  <a:lnTo>
+                    <a:pt x="3724371" y="2399823"/>
+                  </a:lnTo>
+                  <a:lnTo>
+                    <a:pt x="3795993" y="2420050"/>
+                  </a:lnTo>
+                  <a:lnTo>
+                    <a:pt x="3867616" y="2439721"/>
+                  </a:lnTo>
+                  <a:lnTo>
+                    <a:pt x="3939238" y="2458851"/>
+                  </a:lnTo>
+                  <a:lnTo>
+                    <a:pt x="4010861" y="2477455"/>
+                  </a:lnTo>
+                  <a:lnTo>
+                    <a:pt x="4082483" y="2495548"/>
+                  </a:lnTo>
+                  <a:lnTo>
+                    <a:pt x="4154106" y="2513143"/>
+                  </a:lnTo>
+                  <a:lnTo>
+                    <a:pt x="4225729" y="2530255"/>
+                  </a:lnTo>
+                  <a:lnTo>
+                    <a:pt x="4297351" y="2546896"/>
+                  </a:lnTo>
+                  <a:lnTo>
+                    <a:pt x="4368974" y="2563079"/>
+                  </a:lnTo>
+                  <a:lnTo>
+                    <a:pt x="4440596" y="2578818"/>
+                  </a:lnTo>
+                  <a:lnTo>
+                    <a:pt x="4512219" y="2594123"/>
+                  </a:lnTo>
+                  <a:lnTo>
+                    <a:pt x="4583841" y="2609008"/>
+                  </a:lnTo>
+                  <a:lnTo>
+                    <a:pt x="4655464" y="2623484"/>
+                  </a:lnTo>
+                  <a:lnTo>
+                    <a:pt x="4727086" y="2637562"/>
+                  </a:lnTo>
+                  <a:lnTo>
+                    <a:pt x="4798709" y="2651252"/>
+                  </a:lnTo>
+                  <a:lnTo>
+                    <a:pt x="4870331" y="2664566"/>
+                  </a:lnTo>
+                  <a:lnTo>
+                    <a:pt x="4941954" y="2677514"/>
+                  </a:lnTo>
+                  <a:lnTo>
+                    <a:pt x="5013576" y="2690106"/>
+                  </a:lnTo>
+                  <a:lnTo>
+                    <a:pt x="5085199" y="2702352"/>
+                  </a:lnTo>
+                  <a:lnTo>
+                    <a:pt x="5156821" y="2714262"/>
+                  </a:lnTo>
+                  <a:lnTo>
+                    <a:pt x="5228444" y="2725843"/>
+                  </a:lnTo>
+                  <a:lnTo>
+                    <a:pt x="5300066" y="2737107"/>
+                  </a:lnTo>
+                  <a:lnTo>
+                    <a:pt x="5371689" y="2748060"/>
+                  </a:lnTo>
+                  <a:lnTo>
+                    <a:pt x="5443311" y="2758713"/>
+                  </a:lnTo>
+                  <a:lnTo>
+                    <a:pt x="5514934" y="2769072"/>
+                  </a:lnTo>
+                  <a:lnTo>
+                    <a:pt x="5586557" y="2779147"/>
+                  </a:lnTo>
+                  <a:lnTo>
+                    <a:pt x="5658179" y="2788945"/>
+                  </a:lnTo>
+                  <a:lnTo>
+                    <a:pt x="5729802" y="2798473"/>
+                  </a:lnTo>
+                  <a:lnTo>
+                    <a:pt x="5801424" y="2807739"/>
+                  </a:lnTo>
+                  <a:lnTo>
+                    <a:pt x="5873047" y="2816751"/>
+                  </a:lnTo>
+                  <a:lnTo>
+                    <a:pt x="5944669" y="2825515"/>
+                  </a:lnTo>
+                  <a:lnTo>
+                    <a:pt x="6016292" y="2834037"/>
+                  </a:lnTo>
+                  <a:lnTo>
+                    <a:pt x="6087914" y="2842326"/>
+                  </a:lnTo>
+                  <a:lnTo>
+                    <a:pt x="6159537" y="2850386"/>
+                  </a:lnTo>
+                  <a:lnTo>
+                    <a:pt x="6231159" y="2858225"/>
+                  </a:lnTo>
+                  <a:lnTo>
+                    <a:pt x="6302782" y="2865849"/>
+                  </a:lnTo>
+                  <a:lnTo>
+                    <a:pt x="6374404" y="2873263"/>
+                  </a:lnTo>
+                  <a:lnTo>
+                    <a:pt x="6446027" y="2880473"/>
+                  </a:lnTo>
+                  <a:lnTo>
+                    <a:pt x="6517649" y="2887484"/>
+                  </a:lnTo>
+                  <a:lnTo>
+                    <a:pt x="6589272" y="2894303"/>
+                  </a:lnTo>
+                  <a:lnTo>
+                    <a:pt x="6660894" y="2900935"/>
+                  </a:lnTo>
+                  <a:lnTo>
+                    <a:pt x="6732517" y="2907384"/>
+                  </a:lnTo>
+                  <a:lnTo>
+                    <a:pt x="6804139" y="2913656"/>
+                  </a:lnTo>
+                  <a:lnTo>
+                    <a:pt x="6875762" y="2919755"/>
+                  </a:lnTo>
+                  <a:lnTo>
+                    <a:pt x="6947385" y="2925687"/>
+                  </a:lnTo>
+                  <a:lnTo>
+                    <a:pt x="7019007" y="2931456"/>
+                  </a:lnTo>
+                  <a:lnTo>
+                    <a:pt x="7090630" y="2937066"/>
                   </a:lnTo>
                 </a:path>
               </a:pathLst>
@@ -5037,7 +5031,7 @@
           <p:spPr>
             <a:xfrm>
               <a:off x="817517" y="1896563"/>
-              <a:ext cx="6321612" cy="82021"/>
+              <a:ext cx="6388364" cy="82021"/>
             </a:xfrm>
             <a:prstGeom prst="rect">
               <a:avLst/>
@@ -5069,7 +5063,7 @@
                   <a:latin typeface="Helvetica"/>
                   <a:cs typeface="Helvetica"/>
                 </a:rPr>
-                <a:t>subHR per 10 % decline: 1.39 (1.13-1.69), p = 0.001  |  per IQR decline (Δ = 29.3 %): 2.60 (1.45-4.67)  |  IQR: [-14.6, 14.7] %</a:t>
+                <a:t>subHR per 10 % decline: 1.40 (1.15-1.71), p = &lt;0.001  |  per IQR decline (Δ = 29.3 %): 2.67 (1.49-4.77)  |  IQR: [-14.6, 14.7] %</a:t>
               </a:r>
             </a:p>
           </p:txBody>
